--- a/assets/figures-editable/c1-c2/c2-e10.pptx
+++ b/assets/figures-editable/c1-c2/c2-e10.pptx
@@ -7,7 +7,7 @@
   <p:sldIdLst>
     <p:sldId id="256" r:id="rId7"/>
   </p:sldIdLst>
-  <p:sldSz cx="11948160" cy="7924799" type="screen4x3"/>
+  <p:sldSz cx="12191695" cy="6858000" type="screen4x3"/>
   <p:notesSz cx="6858000" cy="9144000"/>
   <p:defaultTextStyle>
     <a:defPPr>
@@ -3098,14 +3098,14 @@
       <p:grpSpPr/>
       <p:sp>
         <p:nvSpPr>
-          <p:cNvPr id="2" name="text1" descr="sci-ppt:C2-E10-001"/>
+          <p:cNvPr id="2" name="C2-E10 text 0" descr="sci-ppt:o000"/>
           <p:cNvSpPr txBox="1"/>
           <p:nvPr/>
         </p:nvSpPr>
         <p:spPr>
           <a:xfrm>
-            <a:off x="316992" y="268224"/>
-            <a:ext cx="11277600" cy="359054"/>
+            <a:off x="274320" y="118872"/>
+            <a:ext cx="11612880" cy="340105"/>
           </a:xfrm>
           <a:prstGeom prst="rect">
             <a:avLst/>
@@ -3114,7 +3114,7 @@
           <a:effectLst/>
         </p:spPr>
         <p:txBody>
-          <a:bodyPr wrap="none" lIns="27432" rIns="27432" tIns="18288" bIns="18288" anchor="ctr">
+          <a:bodyPr wrap="none" lIns="18288" rIns="18288" tIns="18288" bIns="18288" anchor="t">
             <a:spAutoFit/>
           </a:bodyPr>
           <a:lstStyle/>
@@ -3125,34 +3125,31 @@
               </a:spcAft>
             </a:pPr>
             <a:r>
-              <a:rPr sz="1823" b="0" i="0">
+              <a:rPr sz="1900" b="1" i="0">
                 <a:solidFill>
                   <a:srgbClr val="8EDBD4"/>
                 </a:solidFill>
                 <a:latin typeface="Arial"/>
               </a:rPr>
-              <a:t>C2-E10 | Physical-variable diagram</a:t>
-            </a:r>
-          </a:p>
-        </p:txBody>
-      </p:sp>
-      <p:sp>
-        <p:nvSpPr>
-          <p:cNvPr id="3" name="rect2" descr="sci-ppt:C2-E10-002"/>
-          <p:cNvSpPr/>
+              <a:t>C2-E10 · Declared-input thermal calculation</a:t>
+            </a:r>
+          </a:p>
+        </p:txBody>
+      </p:sp>
+      <p:cxnSp>
+        <p:nvCxnSpPr>
+          <p:cNvPr id="3" name="C2-E10 line 1" descr="sci-ppt:o001"/>
+          <p:cNvCxnSpPr/>
           <p:nvPr/>
-        </p:nvSpPr>
-        <p:spPr>
-          <a:xfrm>
-            <a:off x="1219200" y="1524000"/>
-            <a:ext cx="3048000" cy="2438400"/>
-          </a:xfrm>
-          <a:prstGeom prst="rect">
+        </p:nvCxnSpPr>
+        <p:spPr>
+          <a:xfrm>
+            <a:off x="914400" y="5029200"/>
+            <a:ext cx="5852160" cy="0"/>
+          </a:xfrm>
+          <a:prstGeom prst="line">
             <a:avLst/>
           </a:prstGeom>
-          <a:solidFill>
-            <a:srgbClr val="F6BC77"/>
-          </a:solidFill>
           <a:ln w="19050">
             <a:solidFill>
               <a:srgbClr val="B4C7D2"/>
@@ -3160,31 +3157,21 @@
           </a:ln>
           <a:effectLst/>
         </p:spPr>
-        <p:txBody>
-          <a:bodyPr rtlCol="0" anchor="ctr"/>
-          <a:lstStyle/>
-          <a:p>
-            <a:pPr algn="ctr"/>
-          </a:p>
-        </p:txBody>
-      </p:sp>
-      <p:sp>
-        <p:nvSpPr>
-          <p:cNvPr id="4" name="rect3" descr="sci-ppt:C2-E10-003"/>
-          <p:cNvSpPr/>
+      </p:cxnSp>
+      <p:cxnSp>
+        <p:nvCxnSpPr>
+          <p:cNvPr id="4" name="C2-E10 line 2" descr="sci-ppt:o002"/>
+          <p:cNvCxnSpPr/>
           <p:nvPr/>
-        </p:nvSpPr>
-        <p:spPr>
-          <a:xfrm>
-            <a:off x="4267200" y="1524000"/>
-            <a:ext cx="4876800" cy="2438400"/>
-          </a:xfrm>
-          <a:prstGeom prst="rect">
+        </p:nvCxnSpPr>
+        <p:spPr>
+          <a:xfrm>
+            <a:off x="914400" y="1371600"/>
+            <a:ext cx="0" cy="3657600"/>
+          </a:xfrm>
+          <a:prstGeom prst="line">
             <a:avLst/>
           </a:prstGeom>
-          <a:solidFill>
-            <a:srgbClr val="213E4B"/>
-          </a:solidFill>
           <a:ln w="19050">
             <a:solidFill>
               <a:srgbClr val="B4C7D2"/>
@@ -3192,24 +3179,61 @@
           </a:ln>
           <a:effectLst/>
         </p:spPr>
-        <p:txBody>
-          <a:bodyPr rtlCol="0" anchor="ctr"/>
-          <a:lstStyle/>
-          <a:p>
-            <a:pPr algn="ctr"/>
-          </a:p>
-        </p:txBody>
-      </p:sp>
-      <p:sp>
-        <p:nvSpPr>
-          <p:cNvPr id="5" name="text4" descr="sci-ppt:C2-E10-004"/>
+      </p:cxnSp>
+      <p:cxnSp>
+        <p:nvCxnSpPr>
+          <p:cNvPr id="5" name="C2-E10 line 3" descr="sci-ppt:o003"/>
+          <p:cNvCxnSpPr/>
+          <p:nvPr/>
+        </p:nvCxnSpPr>
+        <p:spPr>
+          <a:xfrm>
+            <a:off x="914400" y="5029200"/>
+            <a:ext cx="0" cy="64008"/>
+          </a:xfrm>
+          <a:prstGeom prst="line">
+            <a:avLst/>
+          </a:prstGeom>
+          <a:ln w="12700">
+            <a:solidFill>
+              <a:srgbClr val="B4C7D2"/>
+            </a:solidFill>
+          </a:ln>
+          <a:effectLst/>
+        </p:spPr>
+      </p:cxnSp>
+      <p:cxnSp>
+        <p:nvCxnSpPr>
+          <p:cNvPr id="6" name="C2-E10 line 4" descr="sci-ppt:o004"/>
+          <p:cNvCxnSpPr/>
+          <p:nvPr/>
+        </p:nvCxnSpPr>
+        <p:spPr>
+          <a:xfrm>
+            <a:off x="914400" y="1371600"/>
+            <a:ext cx="0" cy="3657600"/>
+          </a:xfrm>
+          <a:prstGeom prst="line">
+            <a:avLst/>
+          </a:prstGeom>
+          <a:ln w="7620">
+            <a:solidFill>
+              <a:srgbClr val="2E4756"/>
+            </a:solidFill>
+          </a:ln>
+          <a:effectLst/>
+        </p:spPr>
+      </p:cxnSp>
+      <p:sp>
+        <p:nvSpPr>
+          <p:cNvPr id="7" name="C2-E10 text 5" descr="sci-ppt:o005"/>
           <p:cNvSpPr txBox="1"/>
           <p:nvPr/>
         </p:nvSpPr>
         <p:spPr>
           <a:xfrm>
-            <a:off x="1524000" y="1828800"/>
-            <a:ext cx="3657600" cy="396849"/>
+            <a:off x="457200" y="5111496"/>
+            <a:ext cx="914400" cy="208407"/>
           </a:xfrm>
           <a:prstGeom prst="rect">
             <a:avLst/>
@@ -3218,7 +3242,949 @@
           <a:effectLst/>
         </p:spPr>
         <p:txBody>
-          <a:bodyPr wrap="none" lIns="27432" rIns="27432" tIns="18288" bIns="18288" anchor="ctr">
+          <a:bodyPr wrap="none" lIns="18288" rIns="18288" tIns="18288" bIns="18288" anchor="t">
+            <a:spAutoFit/>
+          </a:bodyPr>
+          <a:lstStyle/>
+          <a:p>
+            <a:pPr algn="ctr">
+              <a:spcAft>
+                <a:spcPts val="0"/>
+              </a:spcAft>
+            </a:pPr>
+            <a:r>
+              <a:rPr sz="1050" b="0" i="0">
+                <a:solidFill>
+                  <a:srgbClr val="B4C7D2"/>
+                </a:solidFill>
+                <a:latin typeface="Arial"/>
+              </a:rPr>
+              <a:t>0</a:t>
+            </a:r>
+          </a:p>
+        </p:txBody>
+      </p:sp>
+      <p:cxnSp>
+        <p:nvCxnSpPr>
+          <p:cNvPr id="8" name="C2-E10 line 6" descr="sci-ppt:o006"/>
+          <p:cNvCxnSpPr/>
+          <p:nvPr/>
+        </p:nvCxnSpPr>
+        <p:spPr>
+          <a:xfrm>
+            <a:off x="1889759" y="5029200"/>
+            <a:ext cx="0" cy="64008"/>
+          </a:xfrm>
+          <a:prstGeom prst="line">
+            <a:avLst/>
+          </a:prstGeom>
+          <a:ln w="12700">
+            <a:solidFill>
+              <a:srgbClr val="B4C7D2"/>
+            </a:solidFill>
+          </a:ln>
+          <a:effectLst/>
+        </p:spPr>
+      </p:cxnSp>
+      <p:cxnSp>
+        <p:nvCxnSpPr>
+          <p:cNvPr id="9" name="C2-E10 line 7" descr="sci-ppt:o007"/>
+          <p:cNvCxnSpPr/>
+          <p:nvPr/>
+        </p:nvCxnSpPr>
+        <p:spPr>
+          <a:xfrm>
+            <a:off x="1889759" y="1371600"/>
+            <a:ext cx="0" cy="3657600"/>
+          </a:xfrm>
+          <a:prstGeom prst="line">
+            <a:avLst/>
+          </a:prstGeom>
+          <a:ln w="7620">
+            <a:solidFill>
+              <a:srgbClr val="2E4756"/>
+            </a:solidFill>
+          </a:ln>
+          <a:effectLst/>
+        </p:spPr>
+      </p:cxnSp>
+      <p:sp>
+        <p:nvSpPr>
+          <p:cNvPr id="10" name="C2-E10 text 8" descr="sci-ppt:o008"/>
+          <p:cNvSpPr txBox="1"/>
+          <p:nvPr/>
+        </p:nvSpPr>
+        <p:spPr>
+          <a:xfrm>
+            <a:off x="1432559" y="5111496"/>
+            <a:ext cx="914400" cy="208407"/>
+          </a:xfrm>
+          <a:prstGeom prst="rect">
+            <a:avLst/>
+          </a:prstGeom>
+          <a:noFill/>
+          <a:effectLst/>
+        </p:spPr>
+        <p:txBody>
+          <a:bodyPr wrap="none" lIns="18288" rIns="18288" tIns="18288" bIns="18288" anchor="t">
+            <a:spAutoFit/>
+          </a:bodyPr>
+          <a:lstStyle/>
+          <a:p>
+            <a:pPr algn="ctr">
+              <a:spcAft>
+                <a:spcPts val="0"/>
+              </a:spcAft>
+            </a:pPr>
+            <a:r>
+              <a:rPr sz="1050" b="0" i="0">
+                <a:solidFill>
+                  <a:srgbClr val="B4C7D2"/>
+                </a:solidFill>
+                <a:latin typeface="Arial"/>
+              </a:rPr>
+              <a:t>1</a:t>
+            </a:r>
+          </a:p>
+        </p:txBody>
+      </p:sp>
+      <p:cxnSp>
+        <p:nvCxnSpPr>
+          <p:cNvPr id="11" name="C2-E10 line 9" descr="sci-ppt:o009"/>
+          <p:cNvCxnSpPr/>
+          <p:nvPr/>
+        </p:nvCxnSpPr>
+        <p:spPr>
+          <a:xfrm>
+            <a:off x="2865120" y="5029200"/>
+            <a:ext cx="0" cy="64008"/>
+          </a:xfrm>
+          <a:prstGeom prst="line">
+            <a:avLst/>
+          </a:prstGeom>
+          <a:ln w="12700">
+            <a:solidFill>
+              <a:srgbClr val="B4C7D2"/>
+            </a:solidFill>
+          </a:ln>
+          <a:effectLst/>
+        </p:spPr>
+      </p:cxnSp>
+      <p:cxnSp>
+        <p:nvCxnSpPr>
+          <p:cNvPr id="12" name="C2-E10 line 10" descr="sci-ppt:o010"/>
+          <p:cNvCxnSpPr/>
+          <p:nvPr/>
+        </p:nvCxnSpPr>
+        <p:spPr>
+          <a:xfrm>
+            <a:off x="2865120" y="1371600"/>
+            <a:ext cx="0" cy="3657600"/>
+          </a:xfrm>
+          <a:prstGeom prst="line">
+            <a:avLst/>
+          </a:prstGeom>
+          <a:ln w="7620">
+            <a:solidFill>
+              <a:srgbClr val="2E4756"/>
+            </a:solidFill>
+          </a:ln>
+          <a:effectLst/>
+        </p:spPr>
+      </p:cxnSp>
+      <p:sp>
+        <p:nvSpPr>
+          <p:cNvPr id="13" name="C2-E10 text 11" descr="sci-ppt:o011"/>
+          <p:cNvSpPr txBox="1"/>
+          <p:nvPr/>
+        </p:nvSpPr>
+        <p:spPr>
+          <a:xfrm>
+            <a:off x="2407920" y="5111496"/>
+            <a:ext cx="914400" cy="208407"/>
+          </a:xfrm>
+          <a:prstGeom prst="rect">
+            <a:avLst/>
+          </a:prstGeom>
+          <a:noFill/>
+          <a:effectLst/>
+        </p:spPr>
+        <p:txBody>
+          <a:bodyPr wrap="none" lIns="18288" rIns="18288" tIns="18288" bIns="18288" anchor="t">
+            <a:spAutoFit/>
+          </a:bodyPr>
+          <a:lstStyle/>
+          <a:p>
+            <a:pPr algn="ctr">
+              <a:spcAft>
+                <a:spcPts val="0"/>
+              </a:spcAft>
+            </a:pPr>
+            <a:r>
+              <a:rPr sz="1050" b="0" i="0">
+                <a:solidFill>
+                  <a:srgbClr val="B4C7D2"/>
+                </a:solidFill>
+                <a:latin typeface="Arial"/>
+              </a:rPr>
+              <a:t>2</a:t>
+            </a:r>
+          </a:p>
+        </p:txBody>
+      </p:sp>
+      <p:cxnSp>
+        <p:nvCxnSpPr>
+          <p:cNvPr id="14" name="C2-E10 line 12" descr="sci-ppt:o012"/>
+          <p:cNvCxnSpPr/>
+          <p:nvPr/>
+        </p:nvCxnSpPr>
+        <p:spPr>
+          <a:xfrm>
+            <a:off x="3840480" y="5029200"/>
+            <a:ext cx="0" cy="64008"/>
+          </a:xfrm>
+          <a:prstGeom prst="line">
+            <a:avLst/>
+          </a:prstGeom>
+          <a:ln w="12700">
+            <a:solidFill>
+              <a:srgbClr val="B4C7D2"/>
+            </a:solidFill>
+          </a:ln>
+          <a:effectLst/>
+        </p:spPr>
+      </p:cxnSp>
+      <p:cxnSp>
+        <p:nvCxnSpPr>
+          <p:cNvPr id="15" name="C2-E10 line 13" descr="sci-ppt:o013"/>
+          <p:cNvCxnSpPr/>
+          <p:nvPr/>
+        </p:nvCxnSpPr>
+        <p:spPr>
+          <a:xfrm>
+            <a:off x="3840480" y="1371600"/>
+            <a:ext cx="0" cy="3657600"/>
+          </a:xfrm>
+          <a:prstGeom prst="line">
+            <a:avLst/>
+          </a:prstGeom>
+          <a:ln w="7620">
+            <a:solidFill>
+              <a:srgbClr val="2E4756"/>
+            </a:solidFill>
+          </a:ln>
+          <a:effectLst/>
+        </p:spPr>
+      </p:cxnSp>
+      <p:sp>
+        <p:nvSpPr>
+          <p:cNvPr id="16" name="C2-E10 text 14" descr="sci-ppt:o014"/>
+          <p:cNvSpPr txBox="1"/>
+          <p:nvPr/>
+        </p:nvSpPr>
+        <p:spPr>
+          <a:xfrm>
+            <a:off x="3383280" y="5111496"/>
+            <a:ext cx="914400" cy="208407"/>
+          </a:xfrm>
+          <a:prstGeom prst="rect">
+            <a:avLst/>
+          </a:prstGeom>
+          <a:noFill/>
+          <a:effectLst/>
+        </p:spPr>
+        <p:txBody>
+          <a:bodyPr wrap="none" lIns="18288" rIns="18288" tIns="18288" bIns="18288" anchor="t">
+            <a:spAutoFit/>
+          </a:bodyPr>
+          <a:lstStyle/>
+          <a:p>
+            <a:pPr algn="ctr">
+              <a:spcAft>
+                <a:spcPts val="0"/>
+              </a:spcAft>
+            </a:pPr>
+            <a:r>
+              <a:rPr sz="1050" b="0" i="0">
+                <a:solidFill>
+                  <a:srgbClr val="B4C7D2"/>
+                </a:solidFill>
+                <a:latin typeface="Arial"/>
+              </a:rPr>
+              <a:t>3</a:t>
+            </a:r>
+          </a:p>
+        </p:txBody>
+      </p:sp>
+      <p:cxnSp>
+        <p:nvCxnSpPr>
+          <p:cNvPr id="17" name="C2-E10 line 15" descr="sci-ppt:o015"/>
+          <p:cNvCxnSpPr/>
+          <p:nvPr/>
+        </p:nvCxnSpPr>
+        <p:spPr>
+          <a:xfrm>
+            <a:off x="4815840" y="5029200"/>
+            <a:ext cx="0" cy="64008"/>
+          </a:xfrm>
+          <a:prstGeom prst="line">
+            <a:avLst/>
+          </a:prstGeom>
+          <a:ln w="12700">
+            <a:solidFill>
+              <a:srgbClr val="B4C7D2"/>
+            </a:solidFill>
+          </a:ln>
+          <a:effectLst/>
+        </p:spPr>
+      </p:cxnSp>
+      <p:cxnSp>
+        <p:nvCxnSpPr>
+          <p:cNvPr id="18" name="C2-E10 line 16" descr="sci-ppt:o016"/>
+          <p:cNvCxnSpPr/>
+          <p:nvPr/>
+        </p:nvCxnSpPr>
+        <p:spPr>
+          <a:xfrm>
+            <a:off x="4815840" y="1371600"/>
+            <a:ext cx="0" cy="3657600"/>
+          </a:xfrm>
+          <a:prstGeom prst="line">
+            <a:avLst/>
+          </a:prstGeom>
+          <a:ln w="7620">
+            <a:solidFill>
+              <a:srgbClr val="2E4756"/>
+            </a:solidFill>
+          </a:ln>
+          <a:effectLst/>
+        </p:spPr>
+      </p:cxnSp>
+      <p:sp>
+        <p:nvSpPr>
+          <p:cNvPr id="19" name="C2-E10 text 17" descr="sci-ppt:o017"/>
+          <p:cNvSpPr txBox="1"/>
+          <p:nvPr/>
+        </p:nvSpPr>
+        <p:spPr>
+          <a:xfrm>
+            <a:off x="4358640" y="5111496"/>
+            <a:ext cx="914400" cy="208407"/>
+          </a:xfrm>
+          <a:prstGeom prst="rect">
+            <a:avLst/>
+          </a:prstGeom>
+          <a:noFill/>
+          <a:effectLst/>
+        </p:spPr>
+        <p:txBody>
+          <a:bodyPr wrap="none" lIns="18288" rIns="18288" tIns="18288" bIns="18288" anchor="t">
+            <a:spAutoFit/>
+          </a:bodyPr>
+          <a:lstStyle/>
+          <a:p>
+            <a:pPr algn="ctr">
+              <a:spcAft>
+                <a:spcPts val="0"/>
+              </a:spcAft>
+            </a:pPr>
+            <a:r>
+              <a:rPr sz="1050" b="0" i="0">
+                <a:solidFill>
+                  <a:srgbClr val="B4C7D2"/>
+                </a:solidFill>
+                <a:latin typeface="Arial"/>
+              </a:rPr>
+              <a:t>4</a:t>
+            </a:r>
+          </a:p>
+        </p:txBody>
+      </p:sp>
+      <p:cxnSp>
+        <p:nvCxnSpPr>
+          <p:cNvPr id="20" name="C2-E10 line 18" descr="sci-ppt:o018"/>
+          <p:cNvCxnSpPr/>
+          <p:nvPr/>
+        </p:nvCxnSpPr>
+        <p:spPr>
+          <a:xfrm>
+            <a:off x="5791200" y="5029200"/>
+            <a:ext cx="0" cy="64008"/>
+          </a:xfrm>
+          <a:prstGeom prst="line">
+            <a:avLst/>
+          </a:prstGeom>
+          <a:ln w="12700">
+            <a:solidFill>
+              <a:srgbClr val="B4C7D2"/>
+            </a:solidFill>
+          </a:ln>
+          <a:effectLst/>
+        </p:spPr>
+      </p:cxnSp>
+      <p:cxnSp>
+        <p:nvCxnSpPr>
+          <p:cNvPr id="21" name="C2-E10 line 19" descr="sci-ppt:o019"/>
+          <p:cNvCxnSpPr/>
+          <p:nvPr/>
+        </p:nvCxnSpPr>
+        <p:spPr>
+          <a:xfrm>
+            <a:off x="5791200" y="1371600"/>
+            <a:ext cx="0" cy="3657600"/>
+          </a:xfrm>
+          <a:prstGeom prst="line">
+            <a:avLst/>
+          </a:prstGeom>
+          <a:ln w="7620">
+            <a:solidFill>
+              <a:srgbClr val="2E4756"/>
+            </a:solidFill>
+          </a:ln>
+          <a:effectLst/>
+        </p:spPr>
+      </p:cxnSp>
+      <p:sp>
+        <p:nvSpPr>
+          <p:cNvPr id="22" name="C2-E10 text 20" descr="sci-ppt:o020"/>
+          <p:cNvSpPr txBox="1"/>
+          <p:nvPr/>
+        </p:nvSpPr>
+        <p:spPr>
+          <a:xfrm>
+            <a:off x="5334000" y="5111496"/>
+            <a:ext cx="914400" cy="208407"/>
+          </a:xfrm>
+          <a:prstGeom prst="rect">
+            <a:avLst/>
+          </a:prstGeom>
+          <a:noFill/>
+          <a:effectLst/>
+        </p:spPr>
+        <p:txBody>
+          <a:bodyPr wrap="none" lIns="18288" rIns="18288" tIns="18288" bIns="18288" anchor="t">
+            <a:spAutoFit/>
+          </a:bodyPr>
+          <a:lstStyle/>
+          <a:p>
+            <a:pPr algn="ctr">
+              <a:spcAft>
+                <a:spcPts val="0"/>
+              </a:spcAft>
+            </a:pPr>
+            <a:r>
+              <a:rPr sz="1050" b="0" i="0">
+                <a:solidFill>
+                  <a:srgbClr val="B4C7D2"/>
+                </a:solidFill>
+                <a:latin typeface="Arial"/>
+              </a:rPr>
+              <a:t>5</a:t>
+            </a:r>
+          </a:p>
+        </p:txBody>
+      </p:sp>
+      <p:cxnSp>
+        <p:nvCxnSpPr>
+          <p:cNvPr id="23" name="C2-E10 line 21" descr="sci-ppt:o021"/>
+          <p:cNvCxnSpPr/>
+          <p:nvPr/>
+        </p:nvCxnSpPr>
+        <p:spPr>
+          <a:xfrm>
+            <a:off x="6766560" y="5029200"/>
+            <a:ext cx="0" cy="64008"/>
+          </a:xfrm>
+          <a:prstGeom prst="line">
+            <a:avLst/>
+          </a:prstGeom>
+          <a:ln w="12700">
+            <a:solidFill>
+              <a:srgbClr val="B4C7D2"/>
+            </a:solidFill>
+          </a:ln>
+          <a:effectLst/>
+        </p:spPr>
+      </p:cxnSp>
+      <p:cxnSp>
+        <p:nvCxnSpPr>
+          <p:cNvPr id="24" name="C2-E10 line 22" descr="sci-ppt:o022"/>
+          <p:cNvCxnSpPr/>
+          <p:nvPr/>
+        </p:nvCxnSpPr>
+        <p:spPr>
+          <a:xfrm>
+            <a:off x="6766560" y="1371600"/>
+            <a:ext cx="0" cy="3657600"/>
+          </a:xfrm>
+          <a:prstGeom prst="line">
+            <a:avLst/>
+          </a:prstGeom>
+          <a:ln w="7620">
+            <a:solidFill>
+              <a:srgbClr val="2E4756"/>
+            </a:solidFill>
+          </a:ln>
+          <a:effectLst/>
+        </p:spPr>
+      </p:cxnSp>
+      <p:sp>
+        <p:nvSpPr>
+          <p:cNvPr id="25" name="C2-E10 text 23" descr="sci-ppt:o023"/>
+          <p:cNvSpPr txBox="1"/>
+          <p:nvPr/>
+        </p:nvSpPr>
+        <p:spPr>
+          <a:xfrm>
+            <a:off x="6309360" y="5111496"/>
+            <a:ext cx="914400" cy="208407"/>
+          </a:xfrm>
+          <a:prstGeom prst="rect">
+            <a:avLst/>
+          </a:prstGeom>
+          <a:noFill/>
+          <a:effectLst/>
+        </p:spPr>
+        <p:txBody>
+          <a:bodyPr wrap="none" lIns="18288" rIns="18288" tIns="18288" bIns="18288" anchor="t">
+            <a:spAutoFit/>
+          </a:bodyPr>
+          <a:lstStyle/>
+          <a:p>
+            <a:pPr algn="ctr">
+              <a:spcAft>
+                <a:spcPts val="0"/>
+              </a:spcAft>
+            </a:pPr>
+            <a:r>
+              <a:rPr sz="1050" b="0" i="0">
+                <a:solidFill>
+                  <a:srgbClr val="B4C7D2"/>
+                </a:solidFill>
+                <a:latin typeface="Arial"/>
+              </a:rPr>
+              <a:t>6</a:t>
+            </a:r>
+          </a:p>
+        </p:txBody>
+      </p:sp>
+      <p:cxnSp>
+        <p:nvCxnSpPr>
+          <p:cNvPr id="26" name="C2-E10 line 24" descr="sci-ppt:o024"/>
+          <p:cNvCxnSpPr/>
+          <p:nvPr/>
+        </p:nvCxnSpPr>
+        <p:spPr>
+          <a:xfrm>
+            <a:off x="850392" y="5029200"/>
+            <a:ext cx="64008" cy="0"/>
+          </a:xfrm>
+          <a:prstGeom prst="line">
+            <a:avLst/>
+          </a:prstGeom>
+          <a:ln w="12700">
+            <a:solidFill>
+              <a:srgbClr val="B4C7D2"/>
+            </a:solidFill>
+          </a:ln>
+          <a:effectLst/>
+        </p:spPr>
+      </p:cxnSp>
+      <p:cxnSp>
+        <p:nvCxnSpPr>
+          <p:cNvPr id="27" name="C2-E10 line 25" descr="sci-ppt:o025"/>
+          <p:cNvCxnSpPr/>
+          <p:nvPr/>
+        </p:nvCxnSpPr>
+        <p:spPr>
+          <a:xfrm>
+            <a:off x="850392" y="4158342"/>
+            <a:ext cx="64008" cy="0"/>
+          </a:xfrm>
+          <a:prstGeom prst="line">
+            <a:avLst/>
+          </a:prstGeom>
+          <a:ln w="12700">
+            <a:solidFill>
+              <a:srgbClr val="B4C7D2"/>
+            </a:solidFill>
+          </a:ln>
+          <a:effectLst/>
+        </p:spPr>
+      </p:cxnSp>
+      <p:cxnSp>
+        <p:nvCxnSpPr>
+          <p:cNvPr id="28" name="C2-E10 line 26" descr="sci-ppt:o026"/>
+          <p:cNvCxnSpPr/>
+          <p:nvPr/>
+        </p:nvCxnSpPr>
+        <p:spPr>
+          <a:xfrm>
+            <a:off x="914400" y="4158342"/>
+            <a:ext cx="5852160" cy="0"/>
+          </a:xfrm>
+          <a:prstGeom prst="line">
+            <a:avLst/>
+          </a:prstGeom>
+          <a:ln w="7620">
+            <a:solidFill>
+              <a:srgbClr val="2E4756"/>
+            </a:solidFill>
+          </a:ln>
+          <a:effectLst/>
+        </p:spPr>
+      </p:cxnSp>
+      <p:sp>
+        <p:nvSpPr>
+          <p:cNvPr id="29" name="C2-E10 text 27" descr="sci-ppt:o027"/>
+          <p:cNvSpPr txBox="1"/>
+          <p:nvPr/>
+        </p:nvSpPr>
+        <p:spPr>
+          <a:xfrm>
+            <a:off x="45720" y="4076046"/>
+            <a:ext cx="777240" cy="208407"/>
+          </a:xfrm>
+          <a:prstGeom prst="rect">
+            <a:avLst/>
+          </a:prstGeom>
+          <a:noFill/>
+          <a:effectLst/>
+        </p:spPr>
+        <p:txBody>
+          <a:bodyPr wrap="none" lIns="18288" rIns="18288" tIns="18288" bIns="18288" anchor="t">
+            <a:spAutoFit/>
+          </a:bodyPr>
+          <a:lstStyle/>
+          <a:p>
+            <a:pPr algn="r">
+              <a:spcAft>
+                <a:spcPts val="0"/>
+              </a:spcAft>
+            </a:pPr>
+            <a:r>
+              <a:rPr sz="1050" b="0" i="0">
+                <a:solidFill>
+                  <a:srgbClr val="B4C7D2"/>
+                </a:solidFill>
+                <a:latin typeface="Arial"/>
+              </a:rPr>
+              <a:t>0.25</a:t>
+            </a:r>
+          </a:p>
+        </p:txBody>
+      </p:sp>
+      <p:cxnSp>
+        <p:nvCxnSpPr>
+          <p:cNvPr id="30" name="C2-E10 line 28" descr="sci-ppt:o028"/>
+          <p:cNvCxnSpPr/>
+          <p:nvPr/>
+        </p:nvCxnSpPr>
+        <p:spPr>
+          <a:xfrm>
+            <a:off x="850392" y="3287485"/>
+            <a:ext cx="64008" cy="0"/>
+          </a:xfrm>
+          <a:prstGeom prst="line">
+            <a:avLst/>
+          </a:prstGeom>
+          <a:ln w="12700">
+            <a:solidFill>
+              <a:srgbClr val="B4C7D2"/>
+            </a:solidFill>
+          </a:ln>
+          <a:effectLst/>
+        </p:spPr>
+      </p:cxnSp>
+      <p:cxnSp>
+        <p:nvCxnSpPr>
+          <p:cNvPr id="31" name="C2-E10 line 29" descr="sci-ppt:o029"/>
+          <p:cNvCxnSpPr/>
+          <p:nvPr/>
+        </p:nvCxnSpPr>
+        <p:spPr>
+          <a:xfrm>
+            <a:off x="914400" y="3287485"/>
+            <a:ext cx="5852160" cy="0"/>
+          </a:xfrm>
+          <a:prstGeom prst="line">
+            <a:avLst/>
+          </a:prstGeom>
+          <a:ln w="7620">
+            <a:solidFill>
+              <a:srgbClr val="2E4756"/>
+            </a:solidFill>
+          </a:ln>
+          <a:effectLst/>
+        </p:spPr>
+      </p:cxnSp>
+      <p:sp>
+        <p:nvSpPr>
+          <p:cNvPr id="32" name="C2-E10 text 30" descr="sci-ppt:o030"/>
+          <p:cNvSpPr txBox="1"/>
+          <p:nvPr/>
+        </p:nvSpPr>
+        <p:spPr>
+          <a:xfrm>
+            <a:off x="45720" y="3205189"/>
+            <a:ext cx="777240" cy="208407"/>
+          </a:xfrm>
+          <a:prstGeom prst="rect">
+            <a:avLst/>
+          </a:prstGeom>
+          <a:noFill/>
+          <a:effectLst/>
+        </p:spPr>
+        <p:txBody>
+          <a:bodyPr wrap="none" lIns="18288" rIns="18288" tIns="18288" bIns="18288" anchor="t">
+            <a:spAutoFit/>
+          </a:bodyPr>
+          <a:lstStyle/>
+          <a:p>
+            <a:pPr algn="r">
+              <a:spcAft>
+                <a:spcPts val="0"/>
+              </a:spcAft>
+            </a:pPr>
+            <a:r>
+              <a:rPr sz="1050" b="0" i="0">
+                <a:solidFill>
+                  <a:srgbClr val="B4C7D2"/>
+                </a:solidFill>
+                <a:latin typeface="Arial"/>
+              </a:rPr>
+              <a:t>0.50</a:t>
+            </a:r>
+          </a:p>
+        </p:txBody>
+      </p:sp>
+      <p:cxnSp>
+        <p:nvCxnSpPr>
+          <p:cNvPr id="33" name="C2-E10 line 31" descr="sci-ppt:o031"/>
+          <p:cNvCxnSpPr/>
+          <p:nvPr/>
+        </p:nvCxnSpPr>
+        <p:spPr>
+          <a:xfrm>
+            <a:off x="850392" y="2416628"/>
+            <a:ext cx="64008" cy="0"/>
+          </a:xfrm>
+          <a:prstGeom prst="line">
+            <a:avLst/>
+          </a:prstGeom>
+          <a:ln w="12700">
+            <a:solidFill>
+              <a:srgbClr val="B4C7D2"/>
+            </a:solidFill>
+          </a:ln>
+          <a:effectLst/>
+        </p:spPr>
+      </p:cxnSp>
+      <p:cxnSp>
+        <p:nvCxnSpPr>
+          <p:cNvPr id="34" name="C2-E10 line 32" descr="sci-ppt:o032"/>
+          <p:cNvCxnSpPr/>
+          <p:nvPr/>
+        </p:nvCxnSpPr>
+        <p:spPr>
+          <a:xfrm>
+            <a:off x="914400" y="2416628"/>
+            <a:ext cx="5852160" cy="0"/>
+          </a:xfrm>
+          <a:prstGeom prst="line">
+            <a:avLst/>
+          </a:prstGeom>
+          <a:ln w="7620">
+            <a:solidFill>
+              <a:srgbClr val="2E4756"/>
+            </a:solidFill>
+          </a:ln>
+          <a:effectLst/>
+        </p:spPr>
+      </p:cxnSp>
+      <p:sp>
+        <p:nvSpPr>
+          <p:cNvPr id="35" name="C2-E10 text 33" descr="sci-ppt:o033"/>
+          <p:cNvSpPr txBox="1"/>
+          <p:nvPr/>
+        </p:nvSpPr>
+        <p:spPr>
+          <a:xfrm>
+            <a:off x="45720" y="2334332"/>
+            <a:ext cx="777240" cy="208407"/>
+          </a:xfrm>
+          <a:prstGeom prst="rect">
+            <a:avLst/>
+          </a:prstGeom>
+          <a:noFill/>
+          <a:effectLst/>
+        </p:spPr>
+        <p:txBody>
+          <a:bodyPr wrap="none" lIns="18288" rIns="18288" tIns="18288" bIns="18288" anchor="t">
+            <a:spAutoFit/>
+          </a:bodyPr>
+          <a:lstStyle/>
+          <a:p>
+            <a:pPr algn="r">
+              <a:spcAft>
+                <a:spcPts val="0"/>
+              </a:spcAft>
+            </a:pPr>
+            <a:r>
+              <a:rPr sz="1050" b="0" i="0">
+                <a:solidFill>
+                  <a:srgbClr val="B4C7D2"/>
+                </a:solidFill>
+                <a:latin typeface="Arial"/>
+              </a:rPr>
+              <a:t>0.75</a:t>
+            </a:r>
+          </a:p>
+        </p:txBody>
+      </p:sp>
+      <p:cxnSp>
+        <p:nvCxnSpPr>
+          <p:cNvPr id="36" name="C2-E10 line 34" descr="sci-ppt:o034"/>
+          <p:cNvCxnSpPr/>
+          <p:nvPr/>
+        </p:nvCxnSpPr>
+        <p:spPr>
+          <a:xfrm>
+            <a:off x="850392" y="1545771"/>
+            <a:ext cx="64008" cy="0"/>
+          </a:xfrm>
+          <a:prstGeom prst="line">
+            <a:avLst/>
+          </a:prstGeom>
+          <a:ln w="12700">
+            <a:solidFill>
+              <a:srgbClr val="B4C7D2"/>
+            </a:solidFill>
+          </a:ln>
+          <a:effectLst/>
+        </p:spPr>
+      </p:cxnSp>
+      <p:cxnSp>
+        <p:nvCxnSpPr>
+          <p:cNvPr id="37" name="C2-E10 line 35" descr="sci-ppt:o035"/>
+          <p:cNvCxnSpPr/>
+          <p:nvPr/>
+        </p:nvCxnSpPr>
+        <p:spPr>
+          <a:xfrm>
+            <a:off x="914400" y="1545771"/>
+            <a:ext cx="5852160" cy="0"/>
+          </a:xfrm>
+          <a:prstGeom prst="line">
+            <a:avLst/>
+          </a:prstGeom>
+          <a:ln w="7620">
+            <a:solidFill>
+              <a:srgbClr val="2E4756"/>
+            </a:solidFill>
+          </a:ln>
+          <a:effectLst/>
+        </p:spPr>
+      </p:cxnSp>
+      <p:sp>
+        <p:nvSpPr>
+          <p:cNvPr id="38" name="C2-E10 text 36" descr="sci-ppt:o036"/>
+          <p:cNvSpPr txBox="1"/>
+          <p:nvPr/>
+        </p:nvSpPr>
+        <p:spPr>
+          <a:xfrm>
+            <a:off x="45720" y="1463475"/>
+            <a:ext cx="777240" cy="208407"/>
+          </a:xfrm>
+          <a:prstGeom prst="rect">
+            <a:avLst/>
+          </a:prstGeom>
+          <a:noFill/>
+          <a:effectLst/>
+        </p:spPr>
+        <p:txBody>
+          <a:bodyPr wrap="none" lIns="18288" rIns="18288" tIns="18288" bIns="18288" anchor="t">
+            <a:spAutoFit/>
+          </a:bodyPr>
+          <a:lstStyle/>
+          <a:p>
+            <a:pPr algn="r">
+              <a:spcAft>
+                <a:spcPts val="0"/>
+              </a:spcAft>
+            </a:pPr>
+            <a:r>
+              <a:rPr sz="1050" b="0" i="0">
+                <a:solidFill>
+                  <a:srgbClr val="B4C7D2"/>
+                </a:solidFill>
+                <a:latin typeface="Arial"/>
+              </a:rPr>
+              <a:t>1.00</a:t>
+            </a:r>
+          </a:p>
+        </p:txBody>
+      </p:sp>
+      <p:sp>
+        <p:nvSpPr>
+          <p:cNvPr id="39" name="C2-E10 text 37" descr="sci-ppt:o037"/>
+          <p:cNvSpPr txBox="1"/>
+          <p:nvPr/>
+        </p:nvSpPr>
+        <p:spPr>
+          <a:xfrm>
+            <a:off x="914400" y="5312664"/>
+            <a:ext cx="5852160" cy="231648"/>
+          </a:xfrm>
+          <a:prstGeom prst="rect">
+            <a:avLst/>
+          </a:prstGeom>
+          <a:noFill/>
+          <a:effectLst/>
+        </p:spPr>
+        <p:txBody>
+          <a:bodyPr wrap="none" lIns="18288" rIns="18288" tIns="18288" bIns="18288" anchor="t">
+            <a:spAutoFit/>
+          </a:bodyPr>
+          <a:lstStyle/>
+          <a:p>
+            <a:pPr algn="ctr">
+              <a:spcAft>
+                <a:spcPts val="0"/>
+              </a:spcAft>
+            </a:pPr>
+            <a:r>
+              <a:rPr sz="1200" b="0" i="0">
+                <a:solidFill>
+                  <a:srgbClr val="E7F0F3"/>
+                </a:solidFill>
+                <a:latin typeface="Arial"/>
+              </a:rPr>
+              <a:t>depth into the droplet  z  (µm)</a:t>
+            </a:r>
+          </a:p>
+        </p:txBody>
+      </p:sp>
+      <p:sp>
+        <p:nvSpPr>
+          <p:cNvPr id="40" name="C2-E10 text 38" descr="sci-ppt:o038"/>
+          <p:cNvSpPr txBox="1"/>
+          <p:nvPr/>
+        </p:nvSpPr>
+        <p:spPr>
+          <a:xfrm>
+            <a:off x="365760" y="1024128"/>
+            <a:ext cx="5852160" cy="231648"/>
+          </a:xfrm>
+          <a:prstGeom prst="rect">
+            <a:avLst/>
+          </a:prstGeom>
+          <a:noFill/>
+          <a:effectLst/>
+        </p:spPr>
+        <p:txBody>
+          <a:bodyPr wrap="none" lIns="18288" rIns="18288" tIns="18288" bIns="18288" anchor="t">
             <a:spAutoFit/>
           </a:bodyPr>
           <a:lstStyle/>
@@ -3229,27 +4195,1523 @@
               </a:spcAft>
             </a:pPr>
             <a:r>
-              <a:rPr sz="2016" b="0" i="0">
+              <a:rPr sz="1200" b="0" i="0">
                 <a:solidFill>
-                  <a:srgbClr val="142632"/>
+                  <a:srgbClr val="E7F0F3"/>
                 </a:solidFill>
                 <a:latin typeface="Arial"/>
               </a:rPr>
-              <a:t>Absorber / side A</a:t>
-            </a:r>
-          </a:p>
-        </p:txBody>
-      </p:sp>
-      <p:sp>
-        <p:nvSpPr>
-          <p:cNvPr id="6" name="text5" descr="sci-ppt:C2-E10-005"/>
+              <a:t>T − T₀ (relative to surface)</a:t>
+            </a:r>
+          </a:p>
+        </p:txBody>
+      </p:sp>
+      <p:sp>
+        <p:nvSpPr>
+          <p:cNvPr id="41" name="C2-E10 polygon 39" descr="sci-ppt:o039"/>
+          <p:cNvSpPr/>
+          <p:nvPr/>
+        </p:nvSpPr>
+        <p:spPr>
+          <a:xfrm>
+            <a:off x="914400" y="1545771"/>
+            <a:ext cx="5852160" cy="3483429"/>
+          </a:xfrm>
+          <a:custGeom>
+            <a:avLst/>
+            <a:gdLst/>
+            <a:ahLst/>
+            <a:cxnLst/>
+            <a:rect l="l" t="t" r="r" b="b"/>
+            <a:pathLst>
+              <a:path w="5852160" h="3483429">
+                <a:moveTo>
+                  <a:pt x="0" y="0"/>
+                </a:moveTo>
+                <a:lnTo>
+                  <a:pt x="39144" y="2821327"/>
+                </a:lnTo>
+                <a:lnTo>
+                  <a:pt x="78289" y="3452865"/>
+                </a:lnTo>
+                <a:lnTo>
+                  <a:pt x="117434" y="3483134"/>
+                </a:lnTo>
+                <a:lnTo>
+                  <a:pt x="156579" y="3483428"/>
+                </a:lnTo>
+                <a:lnTo>
+                  <a:pt x="195724" y="3483428"/>
+                </a:lnTo>
+                <a:lnTo>
+                  <a:pt x="234869" y="3483428"/>
+                </a:lnTo>
+                <a:lnTo>
+                  <a:pt x="274014" y="3483429"/>
+                </a:lnTo>
+                <a:lnTo>
+                  <a:pt x="313159" y="3483429"/>
+                </a:lnTo>
+                <a:lnTo>
+                  <a:pt x="352303" y="3483429"/>
+                </a:lnTo>
+                <a:lnTo>
+                  <a:pt x="391448" y="3483429"/>
+                </a:lnTo>
+                <a:lnTo>
+                  <a:pt x="430593" y="3483429"/>
+                </a:lnTo>
+                <a:lnTo>
+                  <a:pt x="469738" y="3483429"/>
+                </a:lnTo>
+                <a:lnTo>
+                  <a:pt x="508883" y="3483429"/>
+                </a:lnTo>
+                <a:lnTo>
+                  <a:pt x="548028" y="3483429"/>
+                </a:lnTo>
+                <a:lnTo>
+                  <a:pt x="587173" y="3483429"/>
+                </a:lnTo>
+                <a:lnTo>
+                  <a:pt x="626318" y="3483429"/>
+                </a:lnTo>
+                <a:lnTo>
+                  <a:pt x="665463" y="3483429"/>
+                </a:lnTo>
+                <a:lnTo>
+                  <a:pt x="704607" y="3483429"/>
+                </a:lnTo>
+                <a:lnTo>
+                  <a:pt x="743752" y="3483429"/>
+                </a:lnTo>
+                <a:lnTo>
+                  <a:pt x="782897" y="3483429"/>
+                </a:lnTo>
+                <a:lnTo>
+                  <a:pt x="822042" y="3483429"/>
+                </a:lnTo>
+                <a:lnTo>
+                  <a:pt x="861187" y="3483429"/>
+                </a:lnTo>
+                <a:lnTo>
+                  <a:pt x="900332" y="3483429"/>
+                </a:lnTo>
+                <a:lnTo>
+                  <a:pt x="939477" y="3483429"/>
+                </a:lnTo>
+                <a:lnTo>
+                  <a:pt x="978622" y="3483429"/>
+                </a:lnTo>
+                <a:lnTo>
+                  <a:pt x="1017766" y="3483429"/>
+                </a:lnTo>
+                <a:lnTo>
+                  <a:pt x="1056911" y="3483429"/>
+                </a:lnTo>
+                <a:lnTo>
+                  <a:pt x="1096056" y="3483429"/>
+                </a:lnTo>
+                <a:lnTo>
+                  <a:pt x="1135201" y="3483429"/>
+                </a:lnTo>
+                <a:lnTo>
+                  <a:pt x="1174346" y="3483429"/>
+                </a:lnTo>
+                <a:lnTo>
+                  <a:pt x="1213491" y="3483429"/>
+                </a:lnTo>
+                <a:lnTo>
+                  <a:pt x="1252636" y="3483429"/>
+                </a:lnTo>
+                <a:lnTo>
+                  <a:pt x="1291781" y="3483429"/>
+                </a:lnTo>
+                <a:lnTo>
+                  <a:pt x="1330926" y="3483429"/>
+                </a:lnTo>
+                <a:lnTo>
+                  <a:pt x="1370070" y="3483429"/>
+                </a:lnTo>
+                <a:lnTo>
+                  <a:pt x="1409215" y="3483429"/>
+                </a:lnTo>
+                <a:lnTo>
+                  <a:pt x="1448360" y="3483429"/>
+                </a:lnTo>
+                <a:lnTo>
+                  <a:pt x="1487505" y="3483429"/>
+                </a:lnTo>
+                <a:lnTo>
+                  <a:pt x="1526650" y="3483429"/>
+                </a:lnTo>
+                <a:lnTo>
+                  <a:pt x="1565795" y="3483429"/>
+                </a:lnTo>
+                <a:lnTo>
+                  <a:pt x="1604940" y="3483429"/>
+                </a:lnTo>
+                <a:lnTo>
+                  <a:pt x="1644085" y="3483429"/>
+                </a:lnTo>
+                <a:lnTo>
+                  <a:pt x="1683229" y="3483429"/>
+                </a:lnTo>
+                <a:lnTo>
+                  <a:pt x="1722374" y="3483429"/>
+                </a:lnTo>
+                <a:lnTo>
+                  <a:pt x="1761519" y="3483429"/>
+                </a:lnTo>
+                <a:lnTo>
+                  <a:pt x="1800664" y="3483429"/>
+                </a:lnTo>
+                <a:lnTo>
+                  <a:pt x="1839809" y="3483429"/>
+                </a:lnTo>
+                <a:lnTo>
+                  <a:pt x="1878954" y="3483429"/>
+                </a:lnTo>
+                <a:lnTo>
+                  <a:pt x="1918099" y="3483429"/>
+                </a:lnTo>
+                <a:lnTo>
+                  <a:pt x="1957244" y="3483429"/>
+                </a:lnTo>
+                <a:lnTo>
+                  <a:pt x="1996389" y="3483429"/>
+                </a:lnTo>
+                <a:lnTo>
+                  <a:pt x="2035533" y="3483429"/>
+                </a:lnTo>
+                <a:lnTo>
+                  <a:pt x="2074678" y="3483429"/>
+                </a:lnTo>
+                <a:lnTo>
+                  <a:pt x="2113823" y="3483429"/>
+                </a:lnTo>
+                <a:lnTo>
+                  <a:pt x="2152968" y="3483429"/>
+                </a:lnTo>
+                <a:lnTo>
+                  <a:pt x="2192113" y="3483429"/>
+                </a:lnTo>
+                <a:lnTo>
+                  <a:pt x="2231258" y="3483429"/>
+                </a:lnTo>
+                <a:lnTo>
+                  <a:pt x="2270403" y="3483429"/>
+                </a:lnTo>
+                <a:lnTo>
+                  <a:pt x="2309548" y="3483429"/>
+                </a:lnTo>
+                <a:lnTo>
+                  <a:pt x="2348692" y="3483429"/>
+                </a:lnTo>
+                <a:lnTo>
+                  <a:pt x="2387837" y="3483429"/>
+                </a:lnTo>
+                <a:lnTo>
+                  <a:pt x="2426982" y="3483429"/>
+                </a:lnTo>
+                <a:lnTo>
+                  <a:pt x="2466127" y="3483429"/>
+                </a:lnTo>
+                <a:lnTo>
+                  <a:pt x="2505272" y="3483429"/>
+                </a:lnTo>
+                <a:lnTo>
+                  <a:pt x="2544417" y="3483429"/>
+                </a:lnTo>
+                <a:lnTo>
+                  <a:pt x="2583562" y="3483429"/>
+                </a:lnTo>
+                <a:lnTo>
+                  <a:pt x="2622707" y="3483429"/>
+                </a:lnTo>
+                <a:lnTo>
+                  <a:pt x="2661852" y="3483429"/>
+                </a:lnTo>
+                <a:lnTo>
+                  <a:pt x="2700996" y="3483429"/>
+                </a:lnTo>
+                <a:lnTo>
+                  <a:pt x="2740141" y="3483429"/>
+                </a:lnTo>
+                <a:lnTo>
+                  <a:pt x="2779286" y="3483429"/>
+                </a:lnTo>
+                <a:lnTo>
+                  <a:pt x="2818431" y="3483429"/>
+                </a:lnTo>
+                <a:lnTo>
+                  <a:pt x="2857576" y="3483429"/>
+                </a:lnTo>
+                <a:lnTo>
+                  <a:pt x="2896721" y="3483429"/>
+                </a:lnTo>
+                <a:lnTo>
+                  <a:pt x="2935866" y="3483429"/>
+                </a:lnTo>
+                <a:lnTo>
+                  <a:pt x="2975011" y="3483429"/>
+                </a:lnTo>
+                <a:lnTo>
+                  <a:pt x="3014155" y="3483429"/>
+                </a:lnTo>
+                <a:lnTo>
+                  <a:pt x="3053300" y="3483429"/>
+                </a:lnTo>
+                <a:lnTo>
+                  <a:pt x="3092445" y="3483429"/>
+                </a:lnTo>
+                <a:lnTo>
+                  <a:pt x="3131590" y="3483429"/>
+                </a:lnTo>
+                <a:lnTo>
+                  <a:pt x="3170735" y="3483429"/>
+                </a:lnTo>
+                <a:lnTo>
+                  <a:pt x="3209880" y="3483429"/>
+                </a:lnTo>
+                <a:lnTo>
+                  <a:pt x="3249025" y="3483429"/>
+                </a:lnTo>
+                <a:lnTo>
+                  <a:pt x="3288170" y="3483429"/>
+                </a:lnTo>
+                <a:lnTo>
+                  <a:pt x="3327315" y="3483429"/>
+                </a:lnTo>
+                <a:lnTo>
+                  <a:pt x="3366459" y="3483429"/>
+                </a:lnTo>
+                <a:lnTo>
+                  <a:pt x="3405604" y="3483429"/>
+                </a:lnTo>
+                <a:lnTo>
+                  <a:pt x="3444749" y="3483429"/>
+                </a:lnTo>
+                <a:lnTo>
+                  <a:pt x="3483894" y="3483429"/>
+                </a:lnTo>
+                <a:lnTo>
+                  <a:pt x="3523039" y="3483429"/>
+                </a:lnTo>
+                <a:lnTo>
+                  <a:pt x="3562184" y="3483429"/>
+                </a:lnTo>
+                <a:lnTo>
+                  <a:pt x="3601329" y="3483429"/>
+                </a:lnTo>
+                <a:lnTo>
+                  <a:pt x="3640474" y="3483429"/>
+                </a:lnTo>
+                <a:lnTo>
+                  <a:pt x="3679618" y="3483429"/>
+                </a:lnTo>
+                <a:lnTo>
+                  <a:pt x="3718763" y="3483429"/>
+                </a:lnTo>
+                <a:lnTo>
+                  <a:pt x="3757908" y="3483429"/>
+                </a:lnTo>
+                <a:lnTo>
+                  <a:pt x="3797053" y="3483429"/>
+                </a:lnTo>
+                <a:lnTo>
+                  <a:pt x="3836198" y="3483429"/>
+                </a:lnTo>
+                <a:lnTo>
+                  <a:pt x="3875343" y="3483429"/>
+                </a:lnTo>
+                <a:lnTo>
+                  <a:pt x="3914488" y="3483429"/>
+                </a:lnTo>
+                <a:lnTo>
+                  <a:pt x="3953633" y="3483429"/>
+                </a:lnTo>
+                <a:lnTo>
+                  <a:pt x="3992778" y="3483429"/>
+                </a:lnTo>
+                <a:lnTo>
+                  <a:pt x="4031922" y="3483429"/>
+                </a:lnTo>
+                <a:lnTo>
+                  <a:pt x="4071067" y="3483429"/>
+                </a:lnTo>
+                <a:lnTo>
+                  <a:pt x="4110212" y="3483429"/>
+                </a:lnTo>
+                <a:lnTo>
+                  <a:pt x="4149357" y="3483429"/>
+                </a:lnTo>
+                <a:lnTo>
+                  <a:pt x="4188502" y="3483429"/>
+                </a:lnTo>
+                <a:lnTo>
+                  <a:pt x="4227647" y="3483429"/>
+                </a:lnTo>
+                <a:lnTo>
+                  <a:pt x="4266792" y="3483429"/>
+                </a:lnTo>
+                <a:lnTo>
+                  <a:pt x="4305937" y="3483429"/>
+                </a:lnTo>
+                <a:lnTo>
+                  <a:pt x="4345082" y="3483429"/>
+                </a:lnTo>
+                <a:lnTo>
+                  <a:pt x="4384226" y="3483429"/>
+                </a:lnTo>
+                <a:lnTo>
+                  <a:pt x="4423371" y="3483429"/>
+                </a:lnTo>
+                <a:lnTo>
+                  <a:pt x="4462516" y="3483429"/>
+                </a:lnTo>
+                <a:lnTo>
+                  <a:pt x="4501661" y="3483429"/>
+                </a:lnTo>
+                <a:lnTo>
+                  <a:pt x="4540806" y="3483429"/>
+                </a:lnTo>
+                <a:lnTo>
+                  <a:pt x="4579951" y="3483429"/>
+                </a:lnTo>
+                <a:lnTo>
+                  <a:pt x="4619096" y="3483429"/>
+                </a:lnTo>
+                <a:lnTo>
+                  <a:pt x="4658241" y="3483429"/>
+                </a:lnTo>
+                <a:lnTo>
+                  <a:pt x="4697385" y="3483429"/>
+                </a:lnTo>
+                <a:lnTo>
+                  <a:pt x="4736530" y="3483429"/>
+                </a:lnTo>
+                <a:lnTo>
+                  <a:pt x="4775675" y="3483429"/>
+                </a:lnTo>
+                <a:lnTo>
+                  <a:pt x="4814820" y="3483429"/>
+                </a:lnTo>
+                <a:lnTo>
+                  <a:pt x="4853965" y="3483429"/>
+                </a:lnTo>
+                <a:lnTo>
+                  <a:pt x="4893110" y="3483429"/>
+                </a:lnTo>
+                <a:lnTo>
+                  <a:pt x="4932255" y="3483429"/>
+                </a:lnTo>
+                <a:lnTo>
+                  <a:pt x="4971400" y="3483429"/>
+                </a:lnTo>
+                <a:lnTo>
+                  <a:pt x="5010545" y="3483429"/>
+                </a:lnTo>
+                <a:lnTo>
+                  <a:pt x="5049689" y="3483429"/>
+                </a:lnTo>
+                <a:lnTo>
+                  <a:pt x="5088834" y="3483429"/>
+                </a:lnTo>
+                <a:lnTo>
+                  <a:pt x="5127979" y="3483429"/>
+                </a:lnTo>
+                <a:lnTo>
+                  <a:pt x="5167124" y="3483429"/>
+                </a:lnTo>
+                <a:lnTo>
+                  <a:pt x="5206269" y="3483429"/>
+                </a:lnTo>
+                <a:lnTo>
+                  <a:pt x="5245414" y="3483429"/>
+                </a:lnTo>
+                <a:lnTo>
+                  <a:pt x="5284559" y="3483429"/>
+                </a:lnTo>
+                <a:lnTo>
+                  <a:pt x="5323704" y="3483429"/>
+                </a:lnTo>
+                <a:lnTo>
+                  <a:pt x="5362848" y="3483429"/>
+                </a:lnTo>
+                <a:lnTo>
+                  <a:pt x="5401993" y="3483429"/>
+                </a:lnTo>
+                <a:lnTo>
+                  <a:pt x="5441138" y="3483429"/>
+                </a:lnTo>
+                <a:lnTo>
+                  <a:pt x="5480283" y="3483429"/>
+                </a:lnTo>
+                <a:lnTo>
+                  <a:pt x="5519428" y="3483429"/>
+                </a:lnTo>
+                <a:lnTo>
+                  <a:pt x="5558573" y="3483429"/>
+                </a:lnTo>
+                <a:lnTo>
+                  <a:pt x="5597718" y="3483429"/>
+                </a:lnTo>
+                <a:lnTo>
+                  <a:pt x="5636863" y="3483429"/>
+                </a:lnTo>
+                <a:lnTo>
+                  <a:pt x="5676008" y="3483429"/>
+                </a:lnTo>
+                <a:lnTo>
+                  <a:pt x="5715152" y="3483429"/>
+                </a:lnTo>
+                <a:lnTo>
+                  <a:pt x="5754297" y="3483429"/>
+                </a:lnTo>
+                <a:lnTo>
+                  <a:pt x="5793442" y="3483429"/>
+                </a:lnTo>
+                <a:lnTo>
+                  <a:pt x="5832587" y="3483429"/>
+                </a:lnTo>
+                <a:lnTo>
+                  <a:pt x="5852160" y="3483429"/>
+                </a:lnTo>
+              </a:path>
+            </a:pathLst>
+          </a:custGeom>
+          <a:noFill/>
+          <a:ln w="38100">
+            <a:solidFill>
+              <a:srgbClr val="8EDBD4"/>
+            </a:solidFill>
+          </a:ln>
+          <a:effectLst/>
+        </p:spPr>
+        <p:txBody>
+          <a:bodyPr rtlCol="0" anchor="ctr"/>
+          <a:lstStyle/>
+          <a:p>
+            <a:pPr algn="ctr"/>
+          </a:p>
+        </p:txBody>
+      </p:sp>
+      <p:sp>
+        <p:nvSpPr>
+          <p:cNvPr id="42" name="C2-E10 polygon 40" descr="sci-ppt:o040"/>
+          <p:cNvSpPr/>
+          <p:nvPr/>
+        </p:nvSpPr>
+        <p:spPr>
+          <a:xfrm>
+            <a:off x="914400" y="1545771"/>
+            <a:ext cx="5852160" cy="3483429"/>
+          </a:xfrm>
+          <a:custGeom>
+            <a:avLst/>
+            <a:gdLst/>
+            <a:ahLst/>
+            <a:cxnLst/>
+            <a:rect l="l" t="t" r="r" b="b"/>
+            <a:pathLst>
+              <a:path w="5852160" h="3483429">
+                <a:moveTo>
+                  <a:pt x="0" y="0"/>
+                </a:moveTo>
+                <a:lnTo>
+                  <a:pt x="39144" y="363160"/>
+                </a:lnTo>
+                <a:lnTo>
+                  <a:pt x="78289" y="720147"/>
+                </a:lnTo>
+                <a:lnTo>
+                  <a:pt x="117434" y="1065099"/>
+                </a:lnTo>
+                <a:lnTo>
+                  <a:pt x="156579" y="1392756"/>
+                </a:lnTo>
+                <a:lnTo>
+                  <a:pt x="195724" y="1698694"/>
+                </a:lnTo>
+                <a:lnTo>
+                  <a:pt x="234869" y="1979498"/>
+                </a:lnTo>
+                <a:lnTo>
+                  <a:pt x="274014" y="2232849"/>
+                </a:lnTo>
+                <a:lnTo>
+                  <a:pt x="313159" y="2457546"/>
+                </a:lnTo>
+                <a:lnTo>
+                  <a:pt x="352303" y="2653443"/>
+                </a:lnTo>
+                <a:lnTo>
+                  <a:pt x="391448" y="2821327"/>
+                </a:lnTo>
+                <a:lnTo>
+                  <a:pt x="430593" y="2962757"/>
+                </a:lnTo>
+                <a:lnTo>
+                  <a:pt x="469738" y="3079878"/>
+                </a:lnTo>
+                <a:lnTo>
+                  <a:pt x="508883" y="3175218"/>
+                </a:lnTo>
+                <a:lnTo>
+                  <a:pt x="548028" y="3251509"/>
+                </a:lnTo>
+                <a:lnTo>
+                  <a:pt x="587173" y="3311519"/>
+                </a:lnTo>
+                <a:lnTo>
+                  <a:pt x="626318" y="3357920"/>
+                </a:lnTo>
+                <a:lnTo>
+                  <a:pt x="665463" y="3393188"/>
+                </a:lnTo>
+                <a:lnTo>
+                  <a:pt x="704607" y="3419539"/>
+                </a:lnTo>
+                <a:lnTo>
+                  <a:pt x="743752" y="3438892"/>
+                </a:lnTo>
+                <a:lnTo>
+                  <a:pt x="782897" y="3452865"/>
+                </a:lnTo>
+                <a:lnTo>
+                  <a:pt x="822042" y="3462781"/>
+                </a:lnTo>
+                <a:lnTo>
+                  <a:pt x="861187" y="3469699"/>
+                </a:lnTo>
+                <a:lnTo>
+                  <a:pt x="900332" y="3474443"/>
+                </a:lnTo>
+                <a:lnTo>
+                  <a:pt x="939477" y="3477641"/>
+                </a:lnTo>
+                <a:lnTo>
+                  <a:pt x="978622" y="3479760"/>
+                </a:lnTo>
+                <a:lnTo>
+                  <a:pt x="1017766" y="3481140"/>
+                </a:lnTo>
+                <a:lnTo>
+                  <a:pt x="1056911" y="3482024"/>
+                </a:lnTo>
+                <a:lnTo>
+                  <a:pt x="1096056" y="3482580"/>
+                </a:lnTo>
+                <a:lnTo>
+                  <a:pt x="1135201" y="3482925"/>
+                </a:lnTo>
+                <a:lnTo>
+                  <a:pt x="1174346" y="3483134"/>
+                </a:lnTo>
+                <a:lnTo>
+                  <a:pt x="1213491" y="3483259"/>
+                </a:lnTo>
+                <a:lnTo>
+                  <a:pt x="1252636" y="3483333"/>
+                </a:lnTo>
+                <a:lnTo>
+                  <a:pt x="1291781" y="3483375"/>
+                </a:lnTo>
+                <a:lnTo>
+                  <a:pt x="1330926" y="3483399"/>
+                </a:lnTo>
+                <a:lnTo>
+                  <a:pt x="1370070" y="3483413"/>
+                </a:lnTo>
+                <a:lnTo>
+                  <a:pt x="1409215" y="3483420"/>
+                </a:lnTo>
+                <a:lnTo>
+                  <a:pt x="1448360" y="3483424"/>
+                </a:lnTo>
+                <a:lnTo>
+                  <a:pt x="1487505" y="3483426"/>
+                </a:lnTo>
+                <a:lnTo>
+                  <a:pt x="1526650" y="3483427"/>
+                </a:lnTo>
+                <a:lnTo>
+                  <a:pt x="1565795" y="3483428"/>
+                </a:lnTo>
+                <a:lnTo>
+                  <a:pt x="1604940" y="3483428"/>
+                </a:lnTo>
+                <a:lnTo>
+                  <a:pt x="1644085" y="3483428"/>
+                </a:lnTo>
+                <a:lnTo>
+                  <a:pt x="1683229" y="3483428"/>
+                </a:lnTo>
+                <a:lnTo>
+                  <a:pt x="1722374" y="3483428"/>
+                </a:lnTo>
+                <a:lnTo>
+                  <a:pt x="1761519" y="3483428"/>
+                </a:lnTo>
+                <a:lnTo>
+                  <a:pt x="1800664" y="3483428"/>
+                </a:lnTo>
+                <a:lnTo>
+                  <a:pt x="1839809" y="3483428"/>
+                </a:lnTo>
+                <a:lnTo>
+                  <a:pt x="1878954" y="3483428"/>
+                </a:lnTo>
+                <a:lnTo>
+                  <a:pt x="1918099" y="3483428"/>
+                </a:lnTo>
+                <a:lnTo>
+                  <a:pt x="1957244" y="3483428"/>
+                </a:lnTo>
+                <a:lnTo>
+                  <a:pt x="1996389" y="3483428"/>
+                </a:lnTo>
+                <a:lnTo>
+                  <a:pt x="2035533" y="3483428"/>
+                </a:lnTo>
+                <a:lnTo>
+                  <a:pt x="2074678" y="3483428"/>
+                </a:lnTo>
+                <a:lnTo>
+                  <a:pt x="2113823" y="3483428"/>
+                </a:lnTo>
+                <a:lnTo>
+                  <a:pt x="2152968" y="3483428"/>
+                </a:lnTo>
+                <a:lnTo>
+                  <a:pt x="2192113" y="3483428"/>
+                </a:lnTo>
+                <a:lnTo>
+                  <a:pt x="2231258" y="3483428"/>
+                </a:lnTo>
+                <a:lnTo>
+                  <a:pt x="2270403" y="3483428"/>
+                </a:lnTo>
+                <a:lnTo>
+                  <a:pt x="2309548" y="3483428"/>
+                </a:lnTo>
+                <a:lnTo>
+                  <a:pt x="2348692" y="3483428"/>
+                </a:lnTo>
+                <a:lnTo>
+                  <a:pt x="2387837" y="3483428"/>
+                </a:lnTo>
+                <a:lnTo>
+                  <a:pt x="2426982" y="3483428"/>
+                </a:lnTo>
+                <a:lnTo>
+                  <a:pt x="2466127" y="3483428"/>
+                </a:lnTo>
+                <a:lnTo>
+                  <a:pt x="2505272" y="3483429"/>
+                </a:lnTo>
+                <a:lnTo>
+                  <a:pt x="2544417" y="3483429"/>
+                </a:lnTo>
+                <a:lnTo>
+                  <a:pt x="2583562" y="3483429"/>
+                </a:lnTo>
+                <a:lnTo>
+                  <a:pt x="2622707" y="3483429"/>
+                </a:lnTo>
+                <a:lnTo>
+                  <a:pt x="2661852" y="3483429"/>
+                </a:lnTo>
+                <a:lnTo>
+                  <a:pt x="2700996" y="3483429"/>
+                </a:lnTo>
+                <a:lnTo>
+                  <a:pt x="2740141" y="3483429"/>
+                </a:lnTo>
+                <a:lnTo>
+                  <a:pt x="2779286" y="3483429"/>
+                </a:lnTo>
+                <a:lnTo>
+                  <a:pt x="2818431" y="3483429"/>
+                </a:lnTo>
+                <a:lnTo>
+                  <a:pt x="2857576" y="3483429"/>
+                </a:lnTo>
+                <a:lnTo>
+                  <a:pt x="2896721" y="3483429"/>
+                </a:lnTo>
+                <a:lnTo>
+                  <a:pt x="2935866" y="3483429"/>
+                </a:lnTo>
+                <a:lnTo>
+                  <a:pt x="2975011" y="3483429"/>
+                </a:lnTo>
+                <a:lnTo>
+                  <a:pt x="3014155" y="3483429"/>
+                </a:lnTo>
+                <a:lnTo>
+                  <a:pt x="3053300" y="3483429"/>
+                </a:lnTo>
+                <a:lnTo>
+                  <a:pt x="3092445" y="3483429"/>
+                </a:lnTo>
+                <a:lnTo>
+                  <a:pt x="3131590" y="3483429"/>
+                </a:lnTo>
+                <a:lnTo>
+                  <a:pt x="3170735" y="3483429"/>
+                </a:lnTo>
+                <a:lnTo>
+                  <a:pt x="3209880" y="3483429"/>
+                </a:lnTo>
+                <a:lnTo>
+                  <a:pt x="3249025" y="3483429"/>
+                </a:lnTo>
+                <a:lnTo>
+                  <a:pt x="3288170" y="3483429"/>
+                </a:lnTo>
+                <a:lnTo>
+                  <a:pt x="3327315" y="3483429"/>
+                </a:lnTo>
+                <a:lnTo>
+                  <a:pt x="3366459" y="3483429"/>
+                </a:lnTo>
+                <a:lnTo>
+                  <a:pt x="3405604" y="3483429"/>
+                </a:lnTo>
+                <a:lnTo>
+                  <a:pt x="3444749" y="3483429"/>
+                </a:lnTo>
+                <a:lnTo>
+                  <a:pt x="3483894" y="3483429"/>
+                </a:lnTo>
+                <a:lnTo>
+                  <a:pt x="3523039" y="3483429"/>
+                </a:lnTo>
+                <a:lnTo>
+                  <a:pt x="3562184" y="3483429"/>
+                </a:lnTo>
+                <a:lnTo>
+                  <a:pt x="3601329" y="3483429"/>
+                </a:lnTo>
+                <a:lnTo>
+                  <a:pt x="3640474" y="3483429"/>
+                </a:lnTo>
+                <a:lnTo>
+                  <a:pt x="3679618" y="3483429"/>
+                </a:lnTo>
+                <a:lnTo>
+                  <a:pt x="3718763" y="3483429"/>
+                </a:lnTo>
+                <a:lnTo>
+                  <a:pt x="3757908" y="3483429"/>
+                </a:lnTo>
+                <a:lnTo>
+                  <a:pt x="3797053" y="3483429"/>
+                </a:lnTo>
+                <a:lnTo>
+                  <a:pt x="3836198" y="3483429"/>
+                </a:lnTo>
+                <a:lnTo>
+                  <a:pt x="3875343" y="3483429"/>
+                </a:lnTo>
+                <a:lnTo>
+                  <a:pt x="3914488" y="3483429"/>
+                </a:lnTo>
+                <a:lnTo>
+                  <a:pt x="3953633" y="3483429"/>
+                </a:lnTo>
+                <a:lnTo>
+                  <a:pt x="3992778" y="3483429"/>
+                </a:lnTo>
+                <a:lnTo>
+                  <a:pt x="4031922" y="3483429"/>
+                </a:lnTo>
+                <a:lnTo>
+                  <a:pt x="4071067" y="3483429"/>
+                </a:lnTo>
+                <a:lnTo>
+                  <a:pt x="4110212" y="3483429"/>
+                </a:lnTo>
+                <a:lnTo>
+                  <a:pt x="4149357" y="3483429"/>
+                </a:lnTo>
+                <a:lnTo>
+                  <a:pt x="4188502" y="3483429"/>
+                </a:lnTo>
+                <a:lnTo>
+                  <a:pt x="4227647" y="3483429"/>
+                </a:lnTo>
+                <a:lnTo>
+                  <a:pt x="4266792" y="3483429"/>
+                </a:lnTo>
+                <a:lnTo>
+                  <a:pt x="4305937" y="3483429"/>
+                </a:lnTo>
+                <a:lnTo>
+                  <a:pt x="4345082" y="3483429"/>
+                </a:lnTo>
+                <a:lnTo>
+                  <a:pt x="4384226" y="3483429"/>
+                </a:lnTo>
+                <a:lnTo>
+                  <a:pt x="4423371" y="3483429"/>
+                </a:lnTo>
+                <a:lnTo>
+                  <a:pt x="4462516" y="3483429"/>
+                </a:lnTo>
+                <a:lnTo>
+                  <a:pt x="4501661" y="3483429"/>
+                </a:lnTo>
+                <a:lnTo>
+                  <a:pt x="4540806" y="3483429"/>
+                </a:lnTo>
+                <a:lnTo>
+                  <a:pt x="4579951" y="3483429"/>
+                </a:lnTo>
+                <a:lnTo>
+                  <a:pt x="4619096" y="3483429"/>
+                </a:lnTo>
+                <a:lnTo>
+                  <a:pt x="4658241" y="3483429"/>
+                </a:lnTo>
+                <a:lnTo>
+                  <a:pt x="4697385" y="3483429"/>
+                </a:lnTo>
+                <a:lnTo>
+                  <a:pt x="4736530" y="3483429"/>
+                </a:lnTo>
+                <a:lnTo>
+                  <a:pt x="4775675" y="3483429"/>
+                </a:lnTo>
+                <a:lnTo>
+                  <a:pt x="4814820" y="3483429"/>
+                </a:lnTo>
+                <a:lnTo>
+                  <a:pt x="4853965" y="3483429"/>
+                </a:lnTo>
+                <a:lnTo>
+                  <a:pt x="4893110" y="3483429"/>
+                </a:lnTo>
+                <a:lnTo>
+                  <a:pt x="4932255" y="3483429"/>
+                </a:lnTo>
+                <a:lnTo>
+                  <a:pt x="4971400" y="3483429"/>
+                </a:lnTo>
+                <a:lnTo>
+                  <a:pt x="5010545" y="3483429"/>
+                </a:lnTo>
+                <a:lnTo>
+                  <a:pt x="5049689" y="3483429"/>
+                </a:lnTo>
+                <a:lnTo>
+                  <a:pt x="5088834" y="3483429"/>
+                </a:lnTo>
+                <a:lnTo>
+                  <a:pt x="5127979" y="3483429"/>
+                </a:lnTo>
+                <a:lnTo>
+                  <a:pt x="5167124" y="3483429"/>
+                </a:lnTo>
+                <a:lnTo>
+                  <a:pt x="5206269" y="3483429"/>
+                </a:lnTo>
+                <a:lnTo>
+                  <a:pt x="5245414" y="3483429"/>
+                </a:lnTo>
+                <a:lnTo>
+                  <a:pt x="5284559" y="3483429"/>
+                </a:lnTo>
+                <a:lnTo>
+                  <a:pt x="5323704" y="3483429"/>
+                </a:lnTo>
+                <a:lnTo>
+                  <a:pt x="5362848" y="3483429"/>
+                </a:lnTo>
+                <a:lnTo>
+                  <a:pt x="5401993" y="3483429"/>
+                </a:lnTo>
+                <a:lnTo>
+                  <a:pt x="5441138" y="3483429"/>
+                </a:lnTo>
+                <a:lnTo>
+                  <a:pt x="5480283" y="3483429"/>
+                </a:lnTo>
+                <a:lnTo>
+                  <a:pt x="5519428" y="3483429"/>
+                </a:lnTo>
+                <a:lnTo>
+                  <a:pt x="5558573" y="3483429"/>
+                </a:lnTo>
+                <a:lnTo>
+                  <a:pt x="5597718" y="3483429"/>
+                </a:lnTo>
+                <a:lnTo>
+                  <a:pt x="5636863" y="3483429"/>
+                </a:lnTo>
+                <a:lnTo>
+                  <a:pt x="5676008" y="3483429"/>
+                </a:lnTo>
+                <a:lnTo>
+                  <a:pt x="5715152" y="3483429"/>
+                </a:lnTo>
+                <a:lnTo>
+                  <a:pt x="5754297" y="3483429"/>
+                </a:lnTo>
+                <a:lnTo>
+                  <a:pt x="5793442" y="3483429"/>
+                </a:lnTo>
+                <a:lnTo>
+                  <a:pt x="5832587" y="3483429"/>
+                </a:lnTo>
+                <a:lnTo>
+                  <a:pt x="5852160" y="3483429"/>
+                </a:lnTo>
+              </a:path>
+            </a:pathLst>
+          </a:custGeom>
+          <a:noFill/>
+          <a:ln w="38100">
+            <a:solidFill>
+              <a:srgbClr val="F2B880"/>
+            </a:solidFill>
+          </a:ln>
+          <a:effectLst/>
+        </p:spPr>
+        <p:txBody>
+          <a:bodyPr rtlCol="0" anchor="ctr"/>
+          <a:lstStyle/>
+          <a:p>
+            <a:pPr algn="ctr"/>
+          </a:p>
+        </p:txBody>
+      </p:sp>
+      <p:sp>
+        <p:nvSpPr>
+          <p:cNvPr id="43" name="C2-E10 polygon 41" descr="sci-ppt:o041"/>
+          <p:cNvSpPr/>
+          <p:nvPr/>
+        </p:nvSpPr>
+        <p:spPr>
+          <a:xfrm>
+            <a:off x="914400" y="1545771"/>
+            <a:ext cx="5852160" cy="3308863"/>
+          </a:xfrm>
+          <a:custGeom>
+            <a:avLst/>
+            <a:gdLst/>
+            <a:ahLst/>
+            <a:cxnLst/>
+            <a:rect l="l" t="t" r="r" b="b"/>
+            <a:pathLst>
+              <a:path w="5852160" h="3308863">
+                <a:moveTo>
+                  <a:pt x="0" y="0"/>
+                </a:moveTo>
+                <a:lnTo>
+                  <a:pt x="39144" y="36419"/>
+                </a:lnTo>
+                <a:lnTo>
+                  <a:pt x="78289" y="72832"/>
+                </a:lnTo>
+                <a:lnTo>
+                  <a:pt x="117434" y="109232"/>
+                </a:lnTo>
+                <a:lnTo>
+                  <a:pt x="156579" y="145613"/>
+                </a:lnTo>
+                <a:lnTo>
+                  <a:pt x="195724" y="181970"/>
+                </a:lnTo>
+                <a:lnTo>
+                  <a:pt x="234869" y="218295"/>
+                </a:lnTo>
+                <a:lnTo>
+                  <a:pt x="274014" y="254583"/>
+                </a:lnTo>
+                <a:lnTo>
+                  <a:pt x="313159" y="290827"/>
+                </a:lnTo>
+                <a:lnTo>
+                  <a:pt x="352303" y="327022"/>
+                </a:lnTo>
+                <a:lnTo>
+                  <a:pt x="391448" y="363160"/>
+                </a:lnTo>
+                <a:lnTo>
+                  <a:pt x="430593" y="399237"/>
+                </a:lnTo>
+                <a:lnTo>
+                  <a:pt x="469738" y="435245"/>
+                </a:lnTo>
+                <a:lnTo>
+                  <a:pt x="508883" y="471180"/>
+                </a:lnTo>
+                <a:lnTo>
+                  <a:pt x="548028" y="507034"/>
+                </a:lnTo>
+                <a:lnTo>
+                  <a:pt x="587173" y="542802"/>
+                </a:lnTo>
+                <a:lnTo>
+                  <a:pt x="626318" y="578479"/>
+                </a:lnTo>
+                <a:lnTo>
+                  <a:pt x="665463" y="614057"/>
+                </a:lnTo>
+                <a:lnTo>
+                  <a:pt x="704607" y="649532"/>
+                </a:lnTo>
+                <a:lnTo>
+                  <a:pt x="743752" y="684897"/>
+                </a:lnTo>
+                <a:lnTo>
+                  <a:pt x="782897" y="720147"/>
+                </a:lnTo>
+                <a:lnTo>
+                  <a:pt x="822042" y="755276"/>
+                </a:lnTo>
+                <a:lnTo>
+                  <a:pt x="861187" y="790279"/>
+                </a:lnTo>
+                <a:lnTo>
+                  <a:pt x="900332" y="825149"/>
+                </a:lnTo>
+                <a:lnTo>
+                  <a:pt x="939477" y="859883"/>
+                </a:lnTo>
+                <a:lnTo>
+                  <a:pt x="978622" y="894473"/>
+                </a:lnTo>
+                <a:lnTo>
+                  <a:pt x="1017766" y="928915"/>
+                </a:lnTo>
+                <a:lnTo>
+                  <a:pt x="1056911" y="963204"/>
+                </a:lnTo>
+                <a:lnTo>
+                  <a:pt x="1096056" y="997334"/>
+                </a:lnTo>
+                <a:lnTo>
+                  <a:pt x="1135201" y="1031301"/>
+                </a:lnTo>
+                <a:lnTo>
+                  <a:pt x="1174346" y="1065099"/>
+                </a:lnTo>
+                <a:lnTo>
+                  <a:pt x="1213491" y="1098723"/>
+                </a:lnTo>
+                <a:lnTo>
+                  <a:pt x="1252636" y="1132169"/>
+                </a:lnTo>
+                <a:lnTo>
+                  <a:pt x="1291781" y="1165431"/>
+                </a:lnTo>
+                <a:lnTo>
+                  <a:pt x="1330926" y="1198506"/>
+                </a:lnTo>
+                <a:lnTo>
+                  <a:pt x="1370070" y="1231388"/>
+                </a:lnTo>
+                <a:lnTo>
+                  <a:pt x="1409215" y="1264073"/>
+                </a:lnTo>
+                <a:lnTo>
+                  <a:pt x="1448360" y="1296556"/>
+                </a:lnTo>
+                <a:lnTo>
+                  <a:pt x="1487505" y="1328834"/>
+                </a:lnTo>
+                <a:lnTo>
+                  <a:pt x="1526650" y="1360902"/>
+                </a:lnTo>
+                <a:lnTo>
+                  <a:pt x="1565795" y="1392756"/>
+                </a:lnTo>
+                <a:lnTo>
+                  <a:pt x="1604940" y="1424392"/>
+                </a:lnTo>
+                <a:lnTo>
+                  <a:pt x="1644085" y="1455806"/>
+                </a:lnTo>
+                <a:lnTo>
+                  <a:pt x="1683229" y="1486994"/>
+                </a:lnTo>
+                <a:lnTo>
+                  <a:pt x="1722374" y="1517953"/>
+                </a:lnTo>
+                <a:lnTo>
+                  <a:pt x="1761519" y="1548679"/>
+                </a:lnTo>
+                <a:lnTo>
+                  <a:pt x="1800664" y="1579168"/>
+                </a:lnTo>
+                <a:lnTo>
+                  <a:pt x="1839809" y="1609418"/>
+                </a:lnTo>
+                <a:lnTo>
+                  <a:pt x="1878954" y="1639424"/>
+                </a:lnTo>
+                <a:lnTo>
+                  <a:pt x="1918099" y="1669184"/>
+                </a:lnTo>
+                <a:lnTo>
+                  <a:pt x="1957244" y="1698694"/>
+                </a:lnTo>
+                <a:lnTo>
+                  <a:pt x="1996389" y="1727953"/>
+                </a:lnTo>
+                <a:lnTo>
+                  <a:pt x="2035533" y="1756956"/>
+                </a:lnTo>
+                <a:lnTo>
+                  <a:pt x="2074678" y="1785702"/>
+                </a:lnTo>
+                <a:lnTo>
+                  <a:pt x="2113823" y="1814187"/>
+                </a:lnTo>
+                <a:lnTo>
+                  <a:pt x="2152968" y="1842409"/>
+                </a:lnTo>
+                <a:lnTo>
+                  <a:pt x="2192113" y="1870366"/>
+                </a:lnTo>
+                <a:lnTo>
+                  <a:pt x="2231258" y="1898055"/>
+                </a:lnTo>
+                <a:lnTo>
+                  <a:pt x="2270403" y="1925475"/>
+                </a:lnTo>
+                <a:lnTo>
+                  <a:pt x="2309548" y="1952623"/>
+                </a:lnTo>
+                <a:lnTo>
+                  <a:pt x="2348692" y="1979498"/>
+                </a:lnTo>
+                <a:lnTo>
+                  <a:pt x="2387837" y="2006096"/>
+                </a:lnTo>
+                <a:lnTo>
+                  <a:pt x="2426982" y="2032418"/>
+                </a:lnTo>
+                <a:lnTo>
+                  <a:pt x="2466127" y="2058461"/>
+                </a:lnTo>
+                <a:lnTo>
+                  <a:pt x="2505272" y="2084224"/>
+                </a:lnTo>
+                <a:lnTo>
+                  <a:pt x="2544417" y="2109706"/>
+                </a:lnTo>
+                <a:lnTo>
+                  <a:pt x="2583562" y="2134904"/>
+                </a:lnTo>
+                <a:lnTo>
+                  <a:pt x="2622707" y="2159819"/>
+                </a:lnTo>
+                <a:lnTo>
+                  <a:pt x="2661852" y="2184448"/>
+                </a:lnTo>
+                <a:lnTo>
+                  <a:pt x="2700996" y="2208792"/>
+                </a:lnTo>
+                <a:lnTo>
+                  <a:pt x="2740141" y="2232849"/>
+                </a:lnTo>
+                <a:lnTo>
+                  <a:pt x="2779286" y="2256618"/>
+                </a:lnTo>
+                <a:lnTo>
+                  <a:pt x="2818431" y="2280100"/>
+                </a:lnTo>
+                <a:lnTo>
+                  <a:pt x="2857576" y="2303293"/>
+                </a:lnTo>
+                <a:lnTo>
+                  <a:pt x="2896721" y="2326197"/>
+                </a:lnTo>
+                <a:lnTo>
+                  <a:pt x="2935866" y="2348812"/>
+                </a:lnTo>
+                <a:lnTo>
+                  <a:pt x="2975011" y="2371138"/>
+                </a:lnTo>
+                <a:lnTo>
+                  <a:pt x="3014155" y="2393174"/>
+                </a:lnTo>
+                <a:lnTo>
+                  <a:pt x="3053300" y="2414921"/>
+                </a:lnTo>
+                <a:lnTo>
+                  <a:pt x="3092445" y="2436378"/>
+                </a:lnTo>
+                <a:lnTo>
+                  <a:pt x="3131590" y="2457546"/>
+                </a:lnTo>
+                <a:lnTo>
+                  <a:pt x="3170735" y="2478426"/>
+                </a:lnTo>
+                <a:lnTo>
+                  <a:pt x="3209880" y="2499017"/>
+                </a:lnTo>
+                <a:lnTo>
+                  <a:pt x="3249025" y="2519320"/>
+                </a:lnTo>
+                <a:lnTo>
+                  <a:pt x="3288170" y="2539336"/>
+                </a:lnTo>
+                <a:lnTo>
+                  <a:pt x="3327315" y="2559066"/>
+                </a:lnTo>
+                <a:lnTo>
+                  <a:pt x="3366459" y="2578509"/>
+                </a:lnTo>
+                <a:lnTo>
+                  <a:pt x="3405604" y="2597668"/>
+                </a:lnTo>
+                <a:lnTo>
+                  <a:pt x="3444749" y="2616542"/>
+                </a:lnTo>
+                <a:lnTo>
+                  <a:pt x="3483894" y="2635133"/>
+                </a:lnTo>
+                <a:lnTo>
+                  <a:pt x="3523039" y="2653443"/>
+                </a:lnTo>
+                <a:lnTo>
+                  <a:pt x="3562184" y="2671471"/>
+                </a:lnTo>
+                <a:lnTo>
+                  <a:pt x="3601329" y="2689221"/>
+                </a:lnTo>
+                <a:lnTo>
+                  <a:pt x="3640474" y="2706692"/>
+                </a:lnTo>
+                <a:lnTo>
+                  <a:pt x="3679618" y="2723886"/>
+                </a:lnTo>
+                <a:lnTo>
+                  <a:pt x="3718763" y="2740805"/>
+                </a:lnTo>
+                <a:lnTo>
+                  <a:pt x="3757908" y="2757450"/>
+                </a:lnTo>
+                <a:lnTo>
+                  <a:pt x="3797053" y="2773823"/>
+                </a:lnTo>
+                <a:lnTo>
+                  <a:pt x="3836198" y="2789926"/>
+                </a:lnTo>
+                <a:lnTo>
+                  <a:pt x="3875343" y="2805759"/>
+                </a:lnTo>
+                <a:lnTo>
+                  <a:pt x="3914488" y="2821327"/>
+                </a:lnTo>
+                <a:lnTo>
+                  <a:pt x="3953633" y="2836629"/>
+                </a:lnTo>
+                <a:lnTo>
+                  <a:pt x="3992778" y="2851668"/>
+                </a:lnTo>
+                <a:lnTo>
+                  <a:pt x="4031922" y="2866445"/>
+                </a:lnTo>
+                <a:lnTo>
+                  <a:pt x="4071067" y="2880964"/>
+                </a:lnTo>
+                <a:lnTo>
+                  <a:pt x="4110212" y="2895226"/>
+                </a:lnTo>
+                <a:lnTo>
+                  <a:pt x="4149357" y="2909233"/>
+                </a:lnTo>
+                <a:lnTo>
+                  <a:pt x="4188502" y="2922987"/>
+                </a:lnTo>
+                <a:lnTo>
+                  <a:pt x="4227647" y="2936491"/>
+                </a:lnTo>
+                <a:lnTo>
+                  <a:pt x="4266792" y="2949747"/>
+                </a:lnTo>
+                <a:lnTo>
+                  <a:pt x="4305937" y="2962757"/>
+                </a:lnTo>
+                <a:lnTo>
+                  <a:pt x="4345082" y="2975524"/>
+                </a:lnTo>
+                <a:lnTo>
+                  <a:pt x="4384226" y="2988050"/>
+                </a:lnTo>
+                <a:lnTo>
+                  <a:pt x="4423371" y="3000337"/>
+                </a:lnTo>
+                <a:lnTo>
+                  <a:pt x="4462516" y="3012388"/>
+                </a:lnTo>
+                <a:lnTo>
+                  <a:pt x="4501661" y="3024205"/>
+                </a:lnTo>
+                <a:lnTo>
+                  <a:pt x="4540806" y="3035792"/>
+                </a:lnTo>
+                <a:lnTo>
+                  <a:pt x="4579951" y="3047149"/>
+                </a:lnTo>
+                <a:lnTo>
+                  <a:pt x="4619096" y="3058281"/>
+                </a:lnTo>
+                <a:lnTo>
+                  <a:pt x="4658241" y="3069190"/>
+                </a:lnTo>
+                <a:lnTo>
+                  <a:pt x="4697385" y="3079878"/>
+                </a:lnTo>
+                <a:lnTo>
+                  <a:pt x="4736530" y="3090348"/>
+                </a:lnTo>
+                <a:lnTo>
+                  <a:pt x="4775675" y="3100603"/>
+                </a:lnTo>
+                <a:lnTo>
+                  <a:pt x="4814820" y="3110645"/>
+                </a:lnTo>
+                <a:lnTo>
+                  <a:pt x="4853965" y="3120477"/>
+                </a:lnTo>
+                <a:lnTo>
+                  <a:pt x="4893110" y="3130103"/>
+                </a:lnTo>
+                <a:lnTo>
+                  <a:pt x="4932255" y="3139524"/>
+                </a:lnTo>
+                <a:lnTo>
+                  <a:pt x="4971400" y="3148743"/>
+                </a:lnTo>
+                <a:lnTo>
+                  <a:pt x="5010545" y="3157763"/>
+                </a:lnTo>
+                <a:lnTo>
+                  <a:pt x="5049689" y="3166587"/>
+                </a:lnTo>
+                <a:lnTo>
+                  <a:pt x="5088834" y="3175218"/>
+                </a:lnTo>
+                <a:lnTo>
+                  <a:pt x="5127979" y="3183659"/>
+                </a:lnTo>
+                <a:lnTo>
+                  <a:pt x="5167124" y="3191911"/>
+                </a:lnTo>
+                <a:lnTo>
+                  <a:pt x="5206269" y="3199979"/>
+                </a:lnTo>
+                <a:lnTo>
+                  <a:pt x="5245414" y="3207865"/>
+                </a:lnTo>
+                <a:lnTo>
+                  <a:pt x="5284559" y="3215571"/>
+                </a:lnTo>
+                <a:lnTo>
+                  <a:pt x="5323704" y="3223101"/>
+                </a:lnTo>
+                <a:lnTo>
+                  <a:pt x="5362848" y="3230457"/>
+                </a:lnTo>
+                <a:lnTo>
+                  <a:pt x="5401993" y="3237641"/>
+                </a:lnTo>
+                <a:lnTo>
+                  <a:pt x="5441138" y="3244658"/>
+                </a:lnTo>
+                <a:lnTo>
+                  <a:pt x="5480283" y="3251509"/>
+                </a:lnTo>
+                <a:lnTo>
+                  <a:pt x="5519428" y="3258198"/>
+                </a:lnTo>
+                <a:lnTo>
+                  <a:pt x="5558573" y="3264726"/>
+                </a:lnTo>
+                <a:lnTo>
+                  <a:pt x="5597718" y="3271097"/>
+                </a:lnTo>
+                <a:lnTo>
+                  <a:pt x="5636863" y="3277314"/>
+                </a:lnTo>
+                <a:lnTo>
+                  <a:pt x="5676008" y="3283379"/>
+                </a:lnTo>
+                <a:lnTo>
+                  <a:pt x="5715152" y="3289294"/>
+                </a:lnTo>
+                <a:lnTo>
+                  <a:pt x="5754297" y="3295064"/>
+                </a:lnTo>
+                <a:lnTo>
+                  <a:pt x="5793442" y="3300689"/>
+                </a:lnTo>
+                <a:lnTo>
+                  <a:pt x="5832587" y="3306173"/>
+                </a:lnTo>
+                <a:lnTo>
+                  <a:pt x="5852160" y="3308863"/>
+                </a:lnTo>
+              </a:path>
+            </a:pathLst>
+          </a:custGeom>
+          <a:noFill/>
+          <a:ln w="38100">
+            <a:solidFill>
+              <a:srgbClr val="F28BA0"/>
+            </a:solidFill>
+          </a:ln>
+          <a:effectLst/>
+        </p:spPr>
+        <p:txBody>
+          <a:bodyPr rtlCol="0" anchor="ctr"/>
+          <a:lstStyle/>
+          <a:p>
+            <a:pPr algn="ctr"/>
+          </a:p>
+        </p:txBody>
+      </p:sp>
+      <p:cxnSp>
+        <p:nvCxnSpPr>
+          <p:cNvPr id="44" name="C2-E10 line 42" descr="sci-ppt:o042"/>
+          <p:cNvCxnSpPr/>
+          <p:nvPr/>
+        </p:nvCxnSpPr>
+        <p:spPr>
+          <a:xfrm>
+            <a:off x="5791200" y="1371600"/>
+            <a:ext cx="0" cy="3657600"/>
+          </a:xfrm>
+          <a:prstGeom prst="line">
+            <a:avLst/>
+          </a:prstGeom>
+          <a:ln w="16510">
+            <a:solidFill>
+              <a:srgbClr val="B4C7D2"/>
+            </a:solidFill>
+            <a:prstDash val="dash"/>
+          </a:ln>
+          <a:effectLst/>
+        </p:spPr>
+      </p:cxnSp>
+      <p:sp>
+        <p:nvSpPr>
+          <p:cNvPr id="45" name="C2-E10 text 43" descr="sci-ppt:o043"/>
           <p:cNvSpPr txBox="1"/>
           <p:nvPr/>
         </p:nvSpPr>
         <p:spPr>
           <a:xfrm>
-            <a:off x="5669280" y="1828800"/>
-            <a:ext cx="3657600" cy="396849"/>
+            <a:off x="4328160" y="2242457"/>
+            <a:ext cx="1371600" cy="417576"/>
           </a:xfrm>
           <a:prstGeom prst="rect">
             <a:avLst/>
@@ -3258,7 +5720,7 @@
           <a:effectLst/>
         </p:spPr>
         <p:txBody>
-          <a:bodyPr wrap="none" lIns="27432" rIns="27432" tIns="18288" bIns="18288" anchor="ctr">
+          <a:bodyPr wrap="none" lIns="18288" rIns="18288" tIns="18288" bIns="18288" anchor="t">
             <a:spAutoFit/>
           </a:bodyPr>
           <a:lstStyle/>
@@ -3269,51 +5731,291 @@
               </a:spcAft>
             </a:pPr>
             <a:r>
-              <a:rPr sz="2016" b="0" i="0">
+              <a:rPr sz="1200" b="0" i="0">
+                <a:solidFill>
+                  <a:srgbClr val="B4C7D2"/>
+                </a:solidFill>
+                <a:latin typeface="Arial"/>
+              </a:rPr>
+              <a:t>PFC core</a:t>
+            </a:r>
+          </a:p>
+          <a:p>
+            <a:pPr algn="l">
+              <a:spcAft>
+                <a:spcPts val="0"/>
+              </a:spcAft>
+            </a:pPr>
+            <a:r>
+              <a:rPr sz="1200" b="0" i="0">
+                <a:solidFill>
+                  <a:srgbClr val="B4C7D2"/>
+                </a:solidFill>
+                <a:latin typeface="Arial"/>
+              </a:rPr>
+              <a:t>radius 5 µm</a:t>
+            </a:r>
+          </a:p>
+        </p:txBody>
+      </p:sp>
+      <p:sp>
+        <p:nvSpPr>
+          <p:cNvPr id="46" name="C2-E10 text 44" descr="sci-ppt:o044"/>
+          <p:cNvSpPr txBox="1"/>
+          <p:nvPr/>
+        </p:nvSpPr>
+        <p:spPr>
+          <a:xfrm>
+            <a:off x="1065580" y="3021874"/>
+            <a:ext cx="2560320" cy="417576"/>
+          </a:xfrm>
+          <a:prstGeom prst="rect">
+            <a:avLst/>
+          </a:prstGeom>
+          <a:noFill/>
+          <a:effectLst/>
+        </p:spPr>
+        <p:txBody>
+          <a:bodyPr wrap="none" lIns="18288" rIns="18288" tIns="18288" bIns="18288" anchor="t">
+            <a:spAutoFit/>
+          </a:bodyPr>
+          <a:lstStyle/>
+          <a:p>
+            <a:pPr algn="l">
+              <a:spcAft>
+                <a:spcPts val="0"/>
+              </a:spcAft>
+            </a:pPr>
+            <a:r>
+              <a:rPr sz="1200" b="0" i="0">
+                <a:solidFill>
+                  <a:srgbClr val="8EDBD4"/>
+                </a:solidFill>
+                <a:latin typeface="Arial"/>
+              </a:rPr>
+              <a:t>at 10 ns only the outer</a:t>
+            </a:r>
+          </a:p>
+          <a:p>
+            <a:pPr algn="l">
+              <a:spcAft>
+                <a:spcPts val="0"/>
+              </a:spcAft>
+            </a:pPr>
+            <a:r>
+              <a:rPr sz="1200" b="0" i="0">
+                <a:solidFill>
+                  <a:srgbClr val="8EDBD4"/>
+                </a:solidFill>
+                <a:latin typeface="Arial"/>
+              </a:rPr>
+              <a:t>~22 nm is warm</a:t>
+            </a:r>
+          </a:p>
+        </p:txBody>
+      </p:sp>
+      <p:sp>
+        <p:nvSpPr>
+          <p:cNvPr id="47" name="C2-E10 text 45" descr="sci-ppt:o045"/>
+          <p:cNvSpPr txBox="1"/>
+          <p:nvPr/>
+        </p:nvSpPr>
+        <p:spPr>
+          <a:xfrm>
+            <a:off x="1670304" y="4032068"/>
+            <a:ext cx="1645920" cy="231648"/>
+          </a:xfrm>
+          <a:prstGeom prst="rect">
+            <a:avLst/>
+          </a:prstGeom>
+          <a:noFill/>
+          <a:effectLst/>
+        </p:spPr>
+        <p:txBody>
+          <a:bodyPr wrap="none" lIns="18288" rIns="18288" tIns="18288" bIns="18288" anchor="t">
+            <a:spAutoFit/>
+          </a:bodyPr>
+          <a:lstStyle/>
+          <a:p>
+            <a:pPr algn="l">
+              <a:spcAft>
+                <a:spcPts val="0"/>
+              </a:spcAft>
+            </a:pPr>
+            <a:r>
+              <a:rPr sz="1200" b="0" i="0">
+                <a:solidFill>
+                  <a:srgbClr val="F2B880"/>
+                </a:solidFill>
+                <a:latin typeface="Arial"/>
+              </a:rPr>
+              <a:t>1 µs: 0.2 µm</a:t>
+            </a:r>
+          </a:p>
+        </p:txBody>
+      </p:sp>
+      <p:sp>
+        <p:nvSpPr>
+          <p:cNvPr id="48" name="C2-E10 text 46" descr="sci-ppt:o046"/>
+          <p:cNvSpPr txBox="1"/>
+          <p:nvPr/>
+        </p:nvSpPr>
+        <p:spPr>
+          <a:xfrm>
+            <a:off x="3425952" y="2778034"/>
+            <a:ext cx="1645920" cy="231648"/>
+          </a:xfrm>
+          <a:prstGeom prst="rect">
+            <a:avLst/>
+          </a:prstGeom>
+          <a:noFill/>
+          <a:effectLst/>
+        </p:spPr>
+        <p:txBody>
+          <a:bodyPr wrap="none" lIns="18288" rIns="18288" tIns="18288" bIns="18288" anchor="t">
+            <a:spAutoFit/>
+          </a:bodyPr>
+          <a:lstStyle/>
+          <a:p>
+            <a:pPr algn="l">
+              <a:spcAft>
+                <a:spcPts val="0"/>
+              </a:spcAft>
+            </a:pPr>
+            <a:r>
+              <a:rPr sz="1200" b="0" i="0">
+                <a:solidFill>
+                  <a:srgbClr val="F28BA0"/>
+                </a:solidFill>
+                <a:latin typeface="Arial"/>
+              </a:rPr>
+              <a:t>100 µs: 2 µm</a:t>
+            </a:r>
+          </a:p>
+        </p:txBody>
+      </p:sp>
+      <p:sp>
+        <p:nvSpPr>
+          <p:cNvPr id="49" name="C2-E10 round_rect 47" descr="sci-ppt:o047"/>
+          <p:cNvSpPr/>
+          <p:nvPr/>
+        </p:nvSpPr>
+        <p:spPr>
+          <a:xfrm>
+            <a:off x="7040880" y="1371600"/>
+            <a:ext cx="4800600" cy="3657600"/>
+          </a:xfrm>
+          <a:prstGeom prst="roundRect">
+            <a:avLst/>
+          </a:prstGeom>
+          <a:solidFill>
+            <a:srgbClr val="213E4B"/>
+          </a:solidFill>
+          <a:ln w="20320">
+            <a:solidFill>
+              <a:srgbClr val="8EDBD4"/>
+            </a:solidFill>
+          </a:ln>
+          <a:effectLst/>
+        </p:spPr>
+        <p:txBody>
+          <a:bodyPr rtlCol="0" anchor="ctr"/>
+          <a:lstStyle/>
+          <a:p>
+            <a:pPr algn="ctr"/>
+          </a:p>
+        </p:txBody>
+      </p:sp>
+      <p:sp>
+        <p:nvSpPr>
+          <p:cNvPr id="50" name="C2-E10 text 48" descr="sci-ppt:o048"/>
+          <p:cNvSpPr txBox="1"/>
+          <p:nvPr/>
+        </p:nvSpPr>
+        <p:spPr>
+          <a:xfrm>
+            <a:off x="7150608" y="1426464"/>
+            <a:ext cx="4581144" cy="254889"/>
+          </a:xfrm>
+          <a:prstGeom prst="rect">
+            <a:avLst/>
+          </a:prstGeom>
+          <a:noFill/>
+          <a:effectLst/>
+        </p:spPr>
+        <p:txBody>
+          <a:bodyPr wrap="none" lIns="18288" rIns="18288" tIns="18288" bIns="18288" anchor="t">
+            <a:spAutoFit/>
+          </a:bodyPr>
+          <a:lstStyle/>
+          <a:p>
+            <a:pPr algn="l">
+              <a:spcAft>
+                <a:spcPts val="0"/>
+              </a:spcAft>
+            </a:pPr>
+            <a:r>
+              <a:rPr sz="1350" b="1" i="0">
+                <a:solidFill>
+                  <a:srgbClr val="8EDBD4"/>
+                </a:solidFill>
+                <a:latin typeface="Arial"/>
+              </a:rPr>
+              <a:t>Declared numbers</a:t>
+            </a:r>
+          </a:p>
+        </p:txBody>
+      </p:sp>
+      <p:sp>
+        <p:nvSpPr>
+          <p:cNvPr id="51" name="C2-E10 text 49" descr="sci-ppt:o049"/>
+          <p:cNvSpPr txBox="1"/>
+          <p:nvPr/>
+        </p:nvSpPr>
+        <p:spPr>
+          <a:xfrm>
+            <a:off x="7178040" y="1828800"/>
+            <a:ext cx="4572000" cy="239395"/>
+          </a:xfrm>
+          <a:prstGeom prst="rect">
+            <a:avLst/>
+          </a:prstGeom>
+          <a:noFill/>
+          <a:effectLst/>
+        </p:spPr>
+        <p:txBody>
+          <a:bodyPr wrap="none" lIns="18288" rIns="18288" tIns="18288" bIns="18288" anchor="t">
+            <a:spAutoFit/>
+          </a:bodyPr>
+          <a:lstStyle/>
+          <a:p>
+            <a:pPr algn="l">
+              <a:spcAft>
+                <a:spcPts val="0"/>
+              </a:spcAft>
+            </a:pPr>
+            <a:r>
+              <a:rPr sz="1250" b="0" i="0">
                 <a:solidFill>
                   <a:srgbClr val="E7F0F3"/>
                 </a:solidFill>
                 <a:latin typeface="Arial"/>
               </a:rPr>
-              <a:t>PFC / side B</a:t>
-            </a:r>
-          </a:p>
-        </p:txBody>
-      </p:sp>
-      <p:cxnSp>
-        <p:nvCxnSpPr>
-          <p:cNvPr id="7" name="arrow6" descr="sci-ppt:C2-E10-006"/>
-          <p:cNvCxnSpPr/>
-          <p:nvPr/>
-        </p:nvCxnSpPr>
-        <p:spPr>
-          <a:xfrm>
-            <a:off x="3048000" y="2865120"/>
-            <a:ext cx="3291840" cy="0"/>
-          </a:xfrm>
-          <a:prstGeom prst="line">
-            <a:avLst/>
-          </a:prstGeom>
-          <a:ln w="25400">
-            <a:solidFill>
-              <a:srgbClr val="8EDBD4"/>
-            </a:solidFill>
-            <a:headEnd type="none" w="med" len="med"/>
-            <a:tailEnd type="triangle" w="med" len="med"/>
-          </a:ln>
-          <a:effectLst/>
-        </p:spPr>
-      </p:cxnSp>
-      <p:sp>
-        <p:nvSpPr>
-          <p:cNvPr id="8" name="text7" descr="sci-ppt:C2-E10-007"/>
+              <a:t>α = 0.050 / (1630 × 654)</a:t>
+            </a:r>
+          </a:p>
+        </p:txBody>
+      </p:sp>
+      <p:sp>
+        <p:nvSpPr>
+          <p:cNvPr id="52" name="C2-E10 text 50" descr="sci-ppt:o050"/>
           <p:cNvSpPr txBox="1"/>
           <p:nvPr/>
         </p:nvSpPr>
         <p:spPr>
           <a:xfrm>
-            <a:off x="4632960" y="3169920"/>
-            <a:ext cx="4876800" cy="359054"/>
+            <a:off x="7315200" y="2068195"/>
+            <a:ext cx="4480560" cy="262636"/>
           </a:xfrm>
           <a:prstGeom prst="rect">
             <a:avLst/>
@@ -3322,7 +6024,7 @@
           <a:effectLst/>
         </p:spPr>
         <p:txBody>
-          <a:bodyPr wrap="none" lIns="27432" rIns="27432" tIns="18288" bIns="18288" anchor="ctr">
+          <a:bodyPr wrap="none" lIns="18288" rIns="18288" tIns="18288" bIns="18288" anchor="t">
             <a:spAutoFit/>
           </a:bodyPr>
           <a:lstStyle/>
@@ -3333,27 +6035,67 @@
               </a:spcAft>
             </a:pPr>
             <a:r>
-              <a:rPr sz="1823" b="0" i="0">
+              <a:rPr sz="1400" b="1" i="0">
+                <a:solidFill>
+                  <a:srgbClr val="F2B880"/>
+                </a:solidFill>
+                <a:latin typeface="Arial"/>
+              </a:rPr>
+              <a:t>= 4.690×10⁻⁸ m²/s</a:t>
+            </a:r>
+          </a:p>
+        </p:txBody>
+      </p:sp>
+      <p:sp>
+        <p:nvSpPr>
+          <p:cNvPr id="53" name="C2-E10 text 51" descr="sci-ppt:o051"/>
+          <p:cNvSpPr txBox="1"/>
+          <p:nvPr/>
+        </p:nvSpPr>
+        <p:spPr>
+          <a:xfrm>
+            <a:off x="7178040" y="2467991"/>
+            <a:ext cx="4572000" cy="239395"/>
+          </a:xfrm>
+          <a:prstGeom prst="rect">
+            <a:avLst/>
+          </a:prstGeom>
+          <a:noFill/>
+          <a:effectLst/>
+        </p:spPr>
+        <p:txBody>
+          <a:bodyPr wrap="none" lIns="18288" rIns="18288" tIns="18288" bIns="18288" anchor="t">
+            <a:spAutoFit/>
+          </a:bodyPr>
+          <a:lstStyle/>
+          <a:p>
+            <a:pPr algn="l">
+              <a:spcAft>
+                <a:spcPts val="0"/>
+              </a:spcAft>
+            </a:pPr>
+            <a:r>
+              <a:rPr sz="1250" b="0" i="0">
                 <a:solidFill>
                   <a:srgbClr val="E7F0F3"/>
                 </a:solidFill>
                 <a:latin typeface="Arial"/>
               </a:rPr>
-              <a:t>q; normal A → B</a:t>
-            </a:r>
-          </a:p>
-        </p:txBody>
-      </p:sp>
-      <p:sp>
-        <p:nvSpPr>
-          <p:cNvPr id="9" name="text8" descr="sci-ppt:C2-E10-008"/>
+              <a:t>tₜₕ ~ (5 µm)² / α</a:t>
+            </a:r>
+          </a:p>
+        </p:txBody>
+      </p:sp>
+      <p:sp>
+        <p:nvSpPr>
+          <p:cNvPr id="54" name="C2-E10 text 52" descr="sci-ppt:o052"/>
           <p:cNvSpPr txBox="1"/>
           <p:nvPr/>
         </p:nvSpPr>
         <p:spPr>
           <a:xfrm>
-            <a:off x="1219200" y="1097280"/>
-            <a:ext cx="1828800" cy="377952"/>
+            <a:off x="7315200" y="2707386"/>
+            <a:ext cx="4480560" cy="262636"/>
           </a:xfrm>
           <a:prstGeom prst="rect">
             <a:avLst/>
@@ -3362,7 +6104,7 @@
           <a:effectLst/>
         </p:spPr>
         <p:txBody>
-          <a:bodyPr wrap="none" lIns="27432" rIns="27432" tIns="18288" bIns="18288" anchor="ctr">
+          <a:bodyPr wrap="none" lIns="18288" rIns="18288" tIns="18288" bIns="18288" anchor="t">
             <a:spAutoFit/>
           </a:bodyPr>
           <a:lstStyle/>
@@ -3373,27 +6115,67 @@
               </a:spcAft>
             </a:pPr>
             <a:r>
-              <a:rPr sz="1920" b="0" i="0">
+              <a:rPr sz="1400" b="1" i="0">
+                <a:solidFill>
+                  <a:srgbClr val="F2B880"/>
+                </a:solidFill>
+                <a:latin typeface="Arial"/>
+              </a:rPr>
+              <a:t>= 5.33×10⁻⁴ s</a:t>
+            </a:r>
+          </a:p>
+        </p:txBody>
+      </p:sp>
+      <p:sp>
+        <p:nvSpPr>
+          <p:cNvPr id="55" name="C2-E10 text 53" descr="sci-ppt:o053"/>
+          <p:cNvSpPr txBox="1"/>
+          <p:nvPr/>
+        </p:nvSpPr>
+        <p:spPr>
+          <a:xfrm>
+            <a:off x="7178040" y="3107182"/>
+            <a:ext cx="4572000" cy="239395"/>
+          </a:xfrm>
+          <a:prstGeom prst="rect">
+            <a:avLst/>
+          </a:prstGeom>
+          <a:noFill/>
+          <a:effectLst/>
+        </p:spPr>
+        <p:txBody>
+          <a:bodyPr wrap="none" lIns="18288" rIns="18288" tIns="18288" bIns="18288" anchor="t">
+            <a:spAutoFit/>
+          </a:bodyPr>
+          <a:lstStyle/>
+          <a:p>
+            <a:pPr algn="l">
+              <a:spcAft>
+                <a:spcPts val="0"/>
+              </a:spcAft>
+            </a:pPr>
+            <a:r>
+              <a:rPr sz="1250" b="0" i="0">
                 <a:solidFill>
                   <a:srgbClr val="E7F0F3"/>
                 </a:solidFill>
                 <a:latin typeface="Arial"/>
               </a:rPr>
-              <a:t>T_A</a:t>
-            </a:r>
-          </a:p>
-        </p:txBody>
-      </p:sp>
-      <p:sp>
-        <p:nvSpPr>
-          <p:cNvPr id="10" name="text9" descr="sci-ppt:C2-E10-009"/>
+              <a:t>δ_T ~ √(α × 10 ns)</a:t>
+            </a:r>
+          </a:p>
+        </p:txBody>
+      </p:sp>
+      <p:sp>
+        <p:nvSpPr>
+          <p:cNvPr id="56" name="C2-E10 text 54" descr="sci-ppt:o054"/>
           <p:cNvSpPr txBox="1"/>
           <p:nvPr/>
         </p:nvSpPr>
         <p:spPr>
           <a:xfrm>
-            <a:off x="7071360" y="1097280"/>
-            <a:ext cx="1828800" cy="377952"/>
+            <a:off x="7315200" y="3346577"/>
+            <a:ext cx="4480560" cy="262636"/>
           </a:xfrm>
           <a:prstGeom prst="rect">
             <a:avLst/>
@@ -3402,7 +6184,7 @@
           <a:effectLst/>
         </p:spPr>
         <p:txBody>
-          <a:bodyPr wrap="none" lIns="27432" rIns="27432" tIns="18288" bIns="18288" anchor="ctr">
+          <a:bodyPr wrap="none" lIns="18288" rIns="18288" tIns="18288" bIns="18288" anchor="t">
             <a:spAutoFit/>
           </a:bodyPr>
           <a:lstStyle/>
@@ -3413,27 +6195,99 @@
               </a:spcAft>
             </a:pPr>
             <a:r>
-              <a:rPr sz="1920" b="0" i="0">
+              <a:rPr sz="1400" b="1" i="0">
+                <a:solidFill>
+                  <a:srgbClr val="F2B880"/>
+                </a:solidFill>
+                <a:latin typeface="Arial"/>
+              </a:rPr>
+              <a:t>= 2.17×10⁻⁸ m</a:t>
+            </a:r>
+          </a:p>
+        </p:txBody>
+      </p:sp>
+      <p:sp>
+        <p:nvSpPr>
+          <p:cNvPr id="57" name="C2-E10 text 55" descr="sci-ppt:o055"/>
+          <p:cNvSpPr txBox="1"/>
+          <p:nvPr/>
+        </p:nvSpPr>
+        <p:spPr>
+          <a:xfrm>
+            <a:off x="7178040" y="3837813"/>
+            <a:ext cx="4572000" cy="603504"/>
+          </a:xfrm>
+          <a:prstGeom prst="rect">
+            <a:avLst/>
+          </a:prstGeom>
+          <a:noFill/>
+          <a:effectLst/>
+        </p:spPr>
+        <p:txBody>
+          <a:bodyPr wrap="none" lIns="18288" rIns="18288" tIns="18288" bIns="18288" anchor="t">
+            <a:spAutoFit/>
+          </a:bodyPr>
+          <a:lstStyle/>
+          <a:p>
+            <a:pPr algn="l">
+              <a:spcAft>
+                <a:spcPts val="0"/>
+              </a:spcAft>
+            </a:pPr>
+            <a:r>
+              <a:rPr sz="1200" b="0" i="0">
                 <a:solidFill>
                   <a:srgbClr val="E7F0F3"/>
                 </a:solidFill>
                 <a:latin typeface="Arial"/>
               </a:rPr>
-              <a:t>T_B</a:t>
-            </a:r>
-          </a:p>
-        </p:txBody>
-      </p:sp>
-      <p:sp>
-        <p:nvSpPr>
-          <p:cNvPr id="11" name="text10" descr="sci-ppt:C2-E10-010"/>
+              <a:t>A 10 ns pulse heats a layer 230 times thinner than the</a:t>
+            </a:r>
+          </a:p>
+          <a:p>
+            <a:pPr algn="l">
+              <a:spcAft>
+                <a:spcPts val="0"/>
+              </a:spcAft>
+            </a:pPr>
+            <a:r>
+              <a:rPr sz="1200" b="0" i="0">
+                <a:solidFill>
+                  <a:srgbClr val="E7F0F3"/>
+                </a:solidFill>
+                <a:latin typeface="Arial"/>
+              </a:rPr>
+              <a:t>droplet radius. Uniform temperature in a micron-scale</a:t>
+            </a:r>
+          </a:p>
+          <a:p>
+            <a:pPr algn="l">
+              <a:spcAft>
+                <a:spcPts val="0"/>
+              </a:spcAft>
+            </a:pPr>
+            <a:r>
+              <a:rPr sz="1200" b="0" i="0">
+                <a:solidFill>
+                  <a:srgbClr val="E7F0F3"/>
+                </a:solidFill>
+                <a:latin typeface="Arial"/>
+              </a:rPr>
+              <a:t>core is not implied by a short pulse.</a:t>
+            </a:r>
+          </a:p>
+        </p:txBody>
+      </p:sp>
+      <p:sp>
+        <p:nvSpPr>
+          <p:cNvPr id="58" name="C2-E10 text 56" descr="sci-ppt:o056"/>
           <p:cNvSpPr txBox="1"/>
           <p:nvPr/>
         </p:nvSpPr>
         <p:spPr>
           <a:xfrm>
-            <a:off x="1402080" y="4206240"/>
-            <a:ext cx="10363200" cy="340156"/>
+            <a:off x="914400" y="5733288"/>
+            <a:ext cx="10972800" cy="231648"/>
           </a:xfrm>
           <a:prstGeom prst="rect">
             <a:avLst/>
@@ -3442,7 +6296,7 @@
           <a:effectLst/>
         </p:spPr>
         <p:txBody>
-          <a:bodyPr wrap="none" lIns="27432" rIns="27432" tIns="18288" bIns="18288" anchor="ctr">
+          <a:bodyPr wrap="none" lIns="18288" rIns="18288" tIns="18288" bIns="18288" anchor="t">
             <a:spAutoFit/>
           </a:bodyPr>
           <a:lstStyle/>
@@ -3453,57 +6307,27 @@
               </a:spcAft>
             </a:pPr>
             <a:r>
-              <a:rPr sz="1728" b="0" i="0">
+              <a:rPr sz="1200" b="0" i="0">
                 <a:solidFill>
-                  <a:srgbClr val="E7F0F3"/>
+                  <a:srgbClr val="B4C7D2"/>
                 </a:solidFill>
                 <a:latin typeface="Arial"/>
               </a:rPr>
-              <a:t>Thermal path and contact are distinct from optical deposition.</a:t>
-            </a:r>
-          </a:p>
-        </p:txBody>
-      </p:sp>
-      <p:sp>
-        <p:nvSpPr>
-          <p:cNvPr id="12" name="rect11" descr="sci-ppt:C2-E10-011"/>
-          <p:cNvSpPr/>
-          <p:nvPr/>
-        </p:nvSpPr>
-        <p:spPr>
-          <a:xfrm>
-            <a:off x="4279392" y="1536192"/>
-            <a:ext cx="219456" cy="2414016"/>
-          </a:xfrm>
-          <a:prstGeom prst="rect">
-            <a:avLst/>
-          </a:prstGeom>
-          <a:solidFill>
-            <a:srgbClr val="F6BC77"/>
-          </a:solidFill>
-          <a:ln>
-            <a:noFill/>
-          </a:ln>
-          <a:effectLst/>
-        </p:spPr>
-        <p:txBody>
-          <a:bodyPr rtlCol="0" anchor="ctr"/>
-          <a:lstStyle/>
-          <a:p>
-            <a:pPr algn="ctr"/>
-          </a:p>
-        </p:txBody>
-      </p:sp>
-      <p:sp>
-        <p:nvSpPr>
-          <p:cNvPr id="13" name="text12" descr="sci-ppt:C2-E10-012"/>
+              <a:t>Profiles: erfc(z / 2√(αt)), the conduction solution for a surface held at fixed temperature (scale illustration).</a:t>
+            </a:r>
+          </a:p>
+        </p:txBody>
+      </p:sp>
+      <p:sp>
+        <p:nvSpPr>
+          <p:cNvPr id="59" name="C2-E10 text 57" descr="sci-ppt:o057"/>
           <p:cNvSpPr txBox="1"/>
           <p:nvPr/>
         </p:nvSpPr>
         <p:spPr>
           <a:xfrm>
-            <a:off x="9387840" y="2438400"/>
-            <a:ext cx="1950720" cy="340156"/>
+            <a:off x="320040" y="6510528"/>
+            <a:ext cx="11521440" cy="200660"/>
           </a:xfrm>
           <a:prstGeom prst="rect">
             <a:avLst/>
@@ -3512,7 +6336,7 @@
           <a:effectLst/>
         </p:spPr>
         <p:txBody>
-          <a:bodyPr wrap="none" lIns="27432" rIns="27432" tIns="18288" bIns="18288" anchor="ctr">
+          <a:bodyPr wrap="none" lIns="18288" rIns="18288" tIns="18288" bIns="18288" anchor="t">
             <a:spAutoFit/>
           </a:bodyPr>
           <a:lstStyle/>
@@ -3523,373 +6347,13 @@
               </a:spcAft>
             </a:pPr>
             <a:r>
-              <a:rPr sz="1728" b="0" i="0">
-                <a:solidFill>
-                  <a:srgbClr val="E7F0F3"/>
-                </a:solidFill>
-                <a:latin typeface="Arial"/>
-              </a:rPr>
-              <a:t>δ_T</a:t>
-            </a:r>
-          </a:p>
-        </p:txBody>
-      </p:sp>
-      <p:sp>
-        <p:nvSpPr>
-          <p:cNvPr id="14" name="text13" descr="sci-ppt:C2-E10-013"/>
-          <p:cNvSpPr txBox="1"/>
-          <p:nvPr/>
-        </p:nvSpPr>
-        <p:spPr>
-          <a:xfrm>
-            <a:off x="9387840" y="2865120"/>
-            <a:ext cx="1950720" cy="340156"/>
-          </a:xfrm>
-          <a:prstGeom prst="rect">
-            <a:avLst/>
-          </a:prstGeom>
-          <a:noFill/>
-          <a:effectLst/>
-        </p:spPr>
-        <p:txBody>
-          <a:bodyPr wrap="none" lIns="27432" rIns="27432" tIns="18288" bIns="18288" anchor="ctr">
-            <a:spAutoFit/>
-          </a:bodyPr>
-          <a:lstStyle/>
-          <a:p>
-            <a:pPr algn="l">
-              <a:spcAft>
-                <a:spcPts val="0"/>
-              </a:spcAft>
-            </a:pPr>
-            <a:r>
-              <a:rPr sz="1728" b="0" i="0">
-                <a:solidFill>
-                  <a:srgbClr val="E7F0F3"/>
-                </a:solidFill>
-                <a:latin typeface="Arial"/>
-              </a:rPr>
-              <a:t>≪ L_h</a:t>
-            </a:r>
-          </a:p>
-        </p:txBody>
-      </p:sp>
-      <p:sp>
-        <p:nvSpPr>
-          <p:cNvPr id="15" name="text14" descr="sci-ppt:C2-E10-014"/>
-          <p:cNvSpPr txBox="1"/>
-          <p:nvPr/>
-        </p:nvSpPr>
-        <p:spPr>
-          <a:xfrm>
-            <a:off x="365760" y="4974336"/>
-            <a:ext cx="5547360" cy="321259"/>
-          </a:xfrm>
-          <a:prstGeom prst="rect">
-            <a:avLst/>
-          </a:prstGeom>
-          <a:noFill/>
-          <a:effectLst/>
-        </p:spPr>
-        <p:txBody>
-          <a:bodyPr wrap="none" lIns="27432" rIns="27432" tIns="18288" bIns="18288" anchor="ctr">
-            <a:spAutoFit/>
-          </a:bodyPr>
-          <a:lstStyle/>
-          <a:p>
-            <a:pPr algn="l">
-              <a:spcAft>
-                <a:spcPts val="0"/>
-              </a:spcAft>
-            </a:pPr>
-            <a:r>
-              <a:rPr sz="1632" b="0" i="0">
-                <a:solidFill>
-                  <a:srgbClr val="E7F0F3"/>
-                </a:solidFill>
-                <a:latin typeface="Arial"/>
-              </a:rPr>
-              <a:t>α_d = 4.69034×10⁻⁸ m²/s</a:t>
-            </a:r>
-          </a:p>
-        </p:txBody>
-      </p:sp>
-      <p:sp>
-        <p:nvSpPr>
-          <p:cNvPr id="16" name="text15" descr="sci-ppt:C2-E10-015"/>
-          <p:cNvSpPr txBox="1"/>
-          <p:nvPr/>
-        </p:nvSpPr>
-        <p:spPr>
-          <a:xfrm>
-            <a:off x="365760" y="5266944"/>
-            <a:ext cx="5547360" cy="321259"/>
-          </a:xfrm>
-          <a:prstGeom prst="rect">
-            <a:avLst/>
-          </a:prstGeom>
-          <a:noFill/>
-          <a:effectLst/>
-        </p:spPr>
-        <p:txBody>
-          <a:bodyPr wrap="none" lIns="27432" rIns="27432" tIns="18288" bIns="18288" anchor="ctr">
-            <a:spAutoFit/>
-          </a:bodyPr>
-          <a:lstStyle/>
-          <a:p>
-            <a:pPr algn="l">
-              <a:spcAft>
-                <a:spcPts val="0"/>
-              </a:spcAft>
-            </a:pPr>
-            <a:r>
-              <a:rPr sz="1632" b="0" i="0">
-                <a:solidFill>
-                  <a:srgbClr val="E7F0F3"/>
-                </a:solidFill>
-                <a:latin typeface="Arial"/>
-              </a:rPr>
-              <a:t>τ_h = 10 ns</a:t>
-            </a:r>
-          </a:p>
-        </p:txBody>
-      </p:sp>
-      <p:sp>
-        <p:nvSpPr>
-          <p:cNvPr id="17" name="text16" descr="sci-ppt:C2-E10-016"/>
-          <p:cNvSpPr txBox="1"/>
-          <p:nvPr/>
-        </p:nvSpPr>
-        <p:spPr>
-          <a:xfrm>
-            <a:off x="365760" y="5559552"/>
-            <a:ext cx="5547360" cy="321259"/>
-          </a:xfrm>
-          <a:prstGeom prst="rect">
-            <a:avLst/>
-          </a:prstGeom>
-          <a:noFill/>
-          <a:effectLst/>
-        </p:spPr>
-        <p:txBody>
-          <a:bodyPr wrap="none" lIns="27432" rIns="27432" tIns="18288" bIns="18288" anchor="ctr">
-            <a:spAutoFit/>
-          </a:bodyPr>
-          <a:lstStyle/>
-          <a:p>
-            <a:pPr algn="l">
-              <a:spcAft>
-                <a:spcPts val="0"/>
-              </a:spcAft>
-            </a:pPr>
-            <a:r>
-              <a:rPr sz="1632" b="0" i="0">
-                <a:solidFill>
-                  <a:srgbClr val="E7F0F3"/>
-                </a:solidFill>
-                <a:latin typeface="Arial"/>
-              </a:rPr>
-              <a:t>δ_T ≈ 21.66 nm</a:t>
-            </a:r>
-          </a:p>
-        </p:txBody>
-      </p:sp>
-      <p:sp>
-        <p:nvSpPr>
-          <p:cNvPr id="18" name="text17" descr="sci-ppt:C2-E10-017"/>
-          <p:cNvSpPr txBox="1"/>
-          <p:nvPr/>
-        </p:nvSpPr>
-        <p:spPr>
-          <a:xfrm>
-            <a:off x="6156960" y="4974336"/>
-            <a:ext cx="5547360" cy="321259"/>
-          </a:xfrm>
-          <a:prstGeom prst="rect">
-            <a:avLst/>
-          </a:prstGeom>
-          <a:noFill/>
-          <a:effectLst/>
-        </p:spPr>
-        <p:txBody>
-          <a:bodyPr wrap="none" lIns="27432" rIns="27432" tIns="18288" bIns="18288" anchor="ctr">
-            <a:spAutoFit/>
-          </a:bodyPr>
-          <a:lstStyle/>
-          <a:p>
-            <a:pPr algn="l">
-              <a:spcAft>
-                <a:spcPts val="0"/>
-              </a:spcAft>
-            </a:pPr>
-            <a:r>
-              <a:rPr sz="1632" b="0" i="0">
-                <a:solidFill>
-                  <a:srgbClr val="E7F0F3"/>
-                </a:solidFill>
-                <a:latin typeface="Arial"/>
-              </a:rPr>
-              <a:t>L_h = 5 μm</a:t>
-            </a:r>
-          </a:p>
-        </p:txBody>
-      </p:sp>
-      <p:sp>
-        <p:nvSpPr>
-          <p:cNvPr id="19" name="text18" descr="sci-ppt:C2-E10-018"/>
-          <p:cNvSpPr txBox="1"/>
-          <p:nvPr/>
-        </p:nvSpPr>
-        <p:spPr>
-          <a:xfrm>
-            <a:off x="6156960" y="5266944"/>
-            <a:ext cx="5547360" cy="321259"/>
-          </a:xfrm>
-          <a:prstGeom prst="rect">
-            <a:avLst/>
-          </a:prstGeom>
-          <a:noFill/>
-          <a:effectLst/>
-        </p:spPr>
-        <p:txBody>
-          <a:bodyPr wrap="none" lIns="27432" rIns="27432" tIns="18288" bIns="18288" anchor="ctr">
-            <a:spAutoFit/>
-          </a:bodyPr>
-          <a:lstStyle/>
-          <a:p>
-            <a:pPr algn="l">
-              <a:spcAft>
-                <a:spcPts val="0"/>
-              </a:spcAft>
-            </a:pPr>
-            <a:r>
-              <a:rPr sz="1632" b="0" i="0">
-                <a:solidFill>
-                  <a:srgbClr val="E7F0F3"/>
-                </a:solidFill>
-                <a:latin typeface="Arial"/>
-              </a:rPr>
-              <a:t>t_th ≈ 533 μs</a:t>
-            </a:r>
-          </a:p>
-        </p:txBody>
-      </p:sp>
-      <p:sp>
-        <p:nvSpPr>
-          <p:cNvPr id="20" name="text19" descr="sci-ppt:C2-E10-019"/>
-          <p:cNvSpPr txBox="1"/>
-          <p:nvPr/>
-        </p:nvSpPr>
-        <p:spPr>
-          <a:xfrm>
-            <a:off x="6156960" y="5559552"/>
-            <a:ext cx="5547360" cy="321259"/>
-          </a:xfrm>
-          <a:prstGeom prst="rect">
-            <a:avLst/>
-          </a:prstGeom>
-          <a:noFill/>
-          <a:effectLst/>
-        </p:spPr>
-        <p:txBody>
-          <a:bodyPr wrap="none" lIns="27432" rIns="27432" tIns="18288" bIns="18288" anchor="ctr">
-            <a:spAutoFit/>
-          </a:bodyPr>
-          <a:lstStyle/>
-          <a:p>
-            <a:pPr algn="l">
-              <a:spcAft>
-                <a:spcPts val="0"/>
-              </a:spcAft>
-            </a:pPr>
-            <a:r>
-              <a:rPr sz="1632" b="0" i="0">
-                <a:solidFill>
-                  <a:srgbClr val="E7F0F3"/>
-                </a:solidFill>
-                <a:latin typeface="Arial"/>
-              </a:rPr>
-              <a:t>k_d = 0.050, ρ_d = 1630, c_p,d = 654 (SI)</a:t>
-            </a:r>
-          </a:p>
-        </p:txBody>
-      </p:sp>
-      <p:sp>
-        <p:nvSpPr>
-          <p:cNvPr id="21" name="text20" descr="sci-ppt:C2-E10-020"/>
-          <p:cNvSpPr txBox="1"/>
-          <p:nvPr/>
-        </p:nvSpPr>
-        <p:spPr>
-          <a:xfrm>
-            <a:off x="365760" y="6278880"/>
-            <a:ext cx="11277600" cy="302361"/>
-          </a:xfrm>
-          <a:prstGeom prst="rect">
-            <a:avLst/>
-          </a:prstGeom>
-          <a:noFill/>
-          <a:effectLst/>
-        </p:spPr>
-        <p:txBody>
-          <a:bodyPr wrap="none" lIns="27432" rIns="27432" tIns="18288" bIns="18288" anchor="ctr">
-            <a:spAutoFit/>
-          </a:bodyPr>
-          <a:lstStyle/>
-          <a:p>
-            <a:pPr algn="l">
-              <a:spcAft>
-                <a:spcPts val="0"/>
-              </a:spcAft>
-            </a:pPr>
-            <a:r>
-              <a:rPr sz="1536" b="0" i="0">
+              <a:rPr sz="1000" b="0" i="0">
                 <a:solidFill>
                   <a:srgbClr val="B4C7D2"/>
                 </a:solidFill>
                 <a:latin typeface="Arial"/>
               </a:rPr>
-              <a:t>Heated shell is much thinner than the core</a:t>
-            </a:r>
-          </a:p>
-        </p:txBody>
-      </p:sp>
-      <p:sp>
-        <p:nvSpPr>
-          <p:cNvPr id="22" name="text21" descr="sci-ppt:C2-E10-021"/>
-          <p:cNvSpPr txBox="1"/>
-          <p:nvPr/>
-        </p:nvSpPr>
-        <p:spPr>
-          <a:xfrm>
-            <a:off x="365760" y="6571488"/>
-            <a:ext cx="11277600" cy="302361"/>
-          </a:xfrm>
-          <a:prstGeom prst="rect">
-            <a:avLst/>
-          </a:prstGeom>
-          <a:noFill/>
-          <a:effectLst/>
-        </p:spPr>
-        <p:txBody>
-          <a:bodyPr wrap="none" lIns="27432" rIns="27432" tIns="18288" bIns="18288" anchor="ctr">
-            <a:spAutoFit/>
-          </a:bodyPr>
-          <a:lstStyle/>
-          <a:p>
-            <a:pPr algn="l">
-              <a:spcAft>
-                <a:spcPts val="0"/>
-              </a:spcAft>
-            </a:pPr>
-            <a:r>
-              <a:rPr sz="1536" b="0" i="0">
-                <a:solidFill>
-                  <a:srgbClr val="B4C7D2"/>
-                </a:solidFill>
-                <a:latin typeface="Arial"/>
-              </a:rPr>
-              <a:t>Distributed absorbers or later conduction must justify a uniform-core model</a:t>
+              <a:t>Numbers of Eq. C2-E10; profile shapes use the same α.</a:t>
             </a:r>
           </a:p>
         </p:txBody>
